--- a/docs/presentation/KubeEdgeInfer.pptx
+++ b/docs/presentation/KubeEdgeInfer.pptx
@@ -147,7 +147,7 @@
                 </a:solidFill>
                 <a:latin typeface="Calibri"/>
               </a:rPr>
-              <a:t>Per-token bottleneck cost (ms) - lower is better</a:t>
+              <a:t>Time on the slowest machine, per word (ms) - lower is better</a:t>
             </a:r>
           </a:p>
         </c:rich>
@@ -171,7 +171,7 @@
               <c:strCache>
                 <c:ptCount val="1"/>
                 <c:pt idx="0">
-                  <c:v>KubeEdgeInfer (live telemetry)</c:v>
+                  <c:v>Ours - measures all the time</c:v>
                 </c:pt>
               </c:strCache>
             </c:strRef>
@@ -214,19 +214,20 @@
                 <c:ptCount val="4"/>
                 <c:lvl>
                   <c:pt idx="0">
-                    <c:v>Baseline</c:v>
+                    <c:v>Nothing
+wrong</c:v>
                   </c:pt>
                   <c:pt idx="1">
-                    <c:v>Thermal
-throttle</c:v>
+                    <c:v>Machine
+gets hot</c:v>
                   </c:pt>
                   <c:pt idx="2">
                     <c:v>Network
-degradation</c:v>
+gets slow</c:v>
                   </c:pt>
                   <c:pt idx="3">
-                    <c:v>Thermal +
-network</c:v>
+                    <c:v>Both at
+once</c:v>
                   </c:pt>
                 </c:lvl>
               </c:multiLvlStrCache>
@@ -263,7 +264,7 @@
               <c:strCache>
                 <c:ptCount val="1"/>
                 <c:pt idx="0">
-                  <c:v>Profile-once (offline profiling)</c:v>
+                  <c:v>Measure once, then freeze</c:v>
                 </c:pt>
               </c:strCache>
             </c:strRef>
@@ -306,19 +307,20 @@
                 <c:ptCount val="4"/>
                 <c:lvl>
                   <c:pt idx="0">
-                    <c:v>Baseline</c:v>
+                    <c:v>Nothing
+wrong</c:v>
                   </c:pt>
                   <c:pt idx="1">
-                    <c:v>Thermal
-throttle</c:v>
+                    <c:v>Machine
+gets hot</c:v>
                   </c:pt>
                   <c:pt idx="2">
                     <c:v>Network
-degradation</c:v>
+gets slow</c:v>
                   </c:pt>
                   <c:pt idx="3">
-                    <c:v>Thermal +
-network</c:v>
+                    <c:v>Both at
+once</c:v>
                   </c:pt>
                 </c:lvl>
               </c:multiLvlStrCache>
@@ -355,7 +357,7 @@
               <c:strCache>
                 <c:ptCount val="1"/>
                 <c:pt idx="0">
-                  <c:v>Static equal split</c:v>
+                  <c:v>Fixed equal cut</c:v>
                 </c:pt>
               </c:strCache>
             </c:strRef>
@@ -398,19 +400,20 @@
                 <c:ptCount val="4"/>
                 <c:lvl>
                   <c:pt idx="0">
-                    <c:v>Baseline</c:v>
+                    <c:v>Nothing
+wrong</c:v>
                   </c:pt>
                   <c:pt idx="1">
-                    <c:v>Thermal
-throttle</c:v>
+                    <c:v>Machine
+gets hot</c:v>
                   </c:pt>
                   <c:pt idx="2">
                     <c:v>Network
-degradation</c:v>
+gets slow</c:v>
                   </c:pt>
                   <c:pt idx="3">
-                    <c:v>Thermal +
-network</c:v>
+                    <c:v>Both at
+once</c:v>
                   </c:pt>
                 </c:lvl>
               </c:multiLvlStrCache>
@@ -1087,7 +1090,7 @@
           <a:p>
             <a:r>
               <a:rPr lang="en-US" dirty="0"/>
-              <a:t>Emphasise that the eBPF layer is genuinely loaded into the kernel; only the GPU reader has a simulated option.</a:t>
+              <a:t>Stress that eBPF really runs in the kernel. Only the GPU reading has a simulated option.</a:t>
             </a:r>
             <a:endParaRPr lang="en-US" dirty="0"/>
           </a:p>
@@ -1175,7 +1178,7 @@
           <a:p>
             <a:r>
               <a:rPr lang="en-US" dirty="0"/>
-              <a:t>These are the DP's own objective values, reproducible with `go run ./bench/dpsim`. Profile-once matches static here because the pre-fault cluster is homogeneous - it differs only in that it still heals on node loss.</a:t>
+              <a:t>These are the solver's own numbers, reproducible with `go run ./bench/dpsim`. Measure-once matches the fixed cut here because all machines start equal - the difference is that it still recovers when a machine dies.</a:t>
             </a:r>
             <a:endParaRPr lang="en-US" dirty="0"/>
           </a:p>
@@ -1263,7 +1266,7 @@
           <a:p>
             <a:r>
               <a:rPr lang="en-US" dirty="0"/>
-              <a:t>The netem row is the most interesting result: the exact optimiser drops a node on its own.</a:t>
+              <a:t>The network row is the best result: the solver drops a machine all by itself.</a:t>
             </a:r>
             <a:endParaRPr lang="en-US" dirty="0"/>
           </a:p>
@@ -1351,7 +1354,7 @@
           <a:p>
             <a:r>
               <a:rPr lang="en-US" dirty="0"/>
-              <a:t>Be careful and honest here: the gain column measures different quantities across systems. Say so out loud.</a:t>
+              <a:t>Be honest here: the last row measures different things in different columns. Say so out loud.</a:t>
             </a:r>
             <a:endParaRPr lang="en-US" dirty="0"/>
           </a:p>
@@ -1439,7 +1442,7 @@
           <a:p>
             <a:r>
               <a:rPr lang="en-US" dirty="0"/>
-              <a:t>Close on the one-line thesis, then the honest limits.</a:t>
+              <a:t>End on the one-line message, then the honest limits.</a:t>
             </a:r>
             <a:endParaRPr lang="en-US" dirty="0"/>
           </a:p>
@@ -1527,7 +1530,7 @@
           <a:p>
             <a:r>
               <a:rPr lang="en-US" dirty="0"/>
-              <a:t>Ten works, all 2024-2025.</a:t>
+              <a:t>Ten papers, all from 2024-2025.</a:t>
             </a:r>
             <a:endParaRPr lang="en-US" dirty="0"/>
           </a:p>
@@ -1615,7 +1618,7 @@
           <a:p>
             <a:r>
               <a:rPr lang="en-US" dirty="0"/>
-              <a:t>Frame the problem: the split decision is made once, but the hardware it was made for does not stay still.</a:t>
+              <a:t>Main point: the cut is chosen once, but the machines it was chosen for do not stay the same.</a:t>
             </a:r>
             <a:endParaRPr lang="en-US" dirty="0"/>
           </a:p>
@@ -1703,7 +1706,7 @@
           <a:p>
             <a:r>
               <a:rPr lang="en-US" dirty="0"/>
-              <a:t>Each row: what the paper contributes, and the specific limitation KubeEdgeInfer addresses.</a:t>
+              <a:t>Each row: what the paper does, and the gap we fill.</a:t>
             </a:r>
             <a:endParaRPr lang="en-US" dirty="0"/>
           </a:p>
@@ -1791,7 +1794,7 @@
           <a:p>
             <a:r>
               <a:rPr lang="en-US" dirty="0"/>
-              <a:t>Each row: what the paper contributes, and the specific limitation KubeEdgeInfer addresses.</a:t>
+              <a:t>Each row: what the paper does, and the gap we fill.</a:t>
             </a:r>
             <a:endParaRPr lang="en-US" dirty="0"/>
           </a:p>
@@ -1879,7 +1882,7 @@
           <a:p>
             <a:r>
               <a:rPr lang="en-US" dirty="0"/>
-              <a:t>This is the gap slide: every column has one of the four capabilities, none has all of them together.</a:t>
+              <a:t>The gap slide: each column has some of what is needed. None has all of it together.</a:t>
             </a:r>
             <a:endParaRPr lang="en-US" dirty="0"/>
           </a:p>
@@ -1967,7 +1970,7 @@
           <a:p>
             <a:r>
               <a:rPr lang="en-US" dirty="0"/>
-              <a:t>State the problem formally, then break it into the four sub-problems that map onto the four loop stages.</a:t>
+              <a:t>State the problem, then break it into four jobs - one for each stage of the loop.</a:t>
             </a:r>
             <a:endParaRPr lang="en-US" dirty="0"/>
           </a:p>
@@ -2055,7 +2058,7 @@
           <a:p>
             <a:r>
               <a:rPr lang="en-US" dirty="0"/>
-              <a:t>Be explicit that the DP itself is classical - the novelty is the loop it sits inside and the telemetry that feeds it.</a:t>
+              <a:t>Say clearly that the algorithm is standard. What is new is the loop around it and the live data feeding it.</a:t>
             </a:r>
             <a:endParaRPr lang="en-US" dirty="0"/>
           </a:p>
@@ -2143,7 +2146,7 @@
           <a:p>
             <a:r>
               <a:rPr lang="en-US" dirty="0"/>
-              <a:t>Walk the loop left to right, then emphasise that the dashed return arrow is what the related work is missing.</a:t>
+              <a:t>Walk left to right, then point at the dashed arrow going back - that is what the other systems do not have.</a:t>
             </a:r>
             <a:endParaRPr lang="en-US" dirty="0"/>
           </a:p>
@@ -2231,7 +2234,7 @@
           <a:p>
             <a:r>
               <a:rPr lang="en-US" dirty="0"/>
-              <a:t>The DP is textbook. The contribution on this slide is the hysteresis that makes re-solving safe to do continuously.</a:t>
+              <a:t>The solver is textbook. What matters on this slide is the brakes that make it safe to redo it constantly.</a:t>
             </a:r>
             <a:endParaRPr lang="en-US" dirty="0"/>
           </a:p>
@@ -2729,7 +2732,7 @@
                 <a:ea typeface="Cambria" pitchFamily="34" charset="-122"/>
                 <a:cs typeface="Cambria" pitchFamily="34" charset="-120"/>
               </a:rPr>
-              <a:t>A Closed-Loop, eBPF-Driven Kubernetes Framework for Heterogeneous Distributed LLM Inference</a:t>
+              <a:t>Sharing One Big AI Model Across Small Machines - and Fixing the Split While It Runs</a:t>
             </a:r>
             <a:endParaRPr lang="en-US" sz="3000" dirty="0"/>
           </a:p>
@@ -2771,7 +2774,7 @@
                 <a:ea typeface="Calibri" pitchFamily="34" charset="-122"/>
                 <a:cs typeface="Calibri" pitchFamily="34" charset="-120"/>
               </a:rPr>
-              <a:t>Turning the one-time model split into a continuous, self-correcting decision driven by kernel-level measurements.</a:t>
+              <a:t>Most systems choose how to cut the model once. We keep checking, and change the cut whenever the machines change.</a:t>
             </a:r>
             <a:endParaRPr lang="en-US" sz="1500" dirty="0"/>
           </a:p>
@@ -2837,7 +2840,7 @@
                 <a:ea typeface="Calibri" pitchFamily="34" charset="-122"/>
                 <a:cs typeface="Calibri" pitchFamily="34" charset="-120"/>
               </a:rPr>
-              <a:t>eBPF / CO-RE</a:t>
+              <a:t>Kernel measuring (eBPF)</a:t>
             </a:r>
             <a:endParaRPr lang="en-US" sz="950" dirty="0"/>
           </a:p>
@@ -2903,7 +2906,7 @@
                 <a:ea typeface="Calibri" pitchFamily="34" charset="-122"/>
                 <a:cs typeface="Calibri" pitchFamily="34" charset="-120"/>
               </a:rPr>
-              <a:t>Kubernetes operator</a:t>
+              <a:t>Kubernetes</a:t>
             </a:r>
             <a:endParaRPr lang="en-US" sz="950" dirty="0"/>
           </a:p>
@@ -2969,7 +2972,7 @@
                 <a:ea typeface="Calibri" pitchFamily="34" charset="-122"/>
                 <a:cs typeface="Calibri" pitchFamily="34" charset="-120"/>
               </a:rPr>
-              <a:t>Pipeline parallelism</a:t>
+              <a:t>Split by layer</a:t>
             </a:r>
             <a:endParaRPr lang="en-US" sz="950" dirty="0"/>
           </a:p>
@@ -3035,7 +3038,7 @@
                 <a:ea typeface="Calibri" pitchFamily="34" charset="-122"/>
                 <a:cs typeface="Calibri" pitchFamily="34" charset="-120"/>
               </a:rPr>
-              <a:t>Consumer edge hardware</a:t>
+              <a:t>Everyday machines</a:t>
             </a:r>
             <a:endParaRPr lang="en-US" sz="950" dirty="0"/>
           </a:p>
@@ -3184,7 +3187,7 @@
                 <a:ea typeface="Calibri" pitchFamily="34" charset="-122"/>
                 <a:cs typeface="Calibri" pitchFamily="34" charset="-120"/>
               </a:rPr>
-              <a:t>PROPOSED WORK</a:t>
+              <a:t>OUR SYSTEM</a:t>
             </a:r>
             <a:endParaRPr lang="en-US" sz="1150" dirty="0"/>
           </a:p>
@@ -3223,7 +3226,7 @@
                 <a:ea typeface="Cambria" pitchFamily="34" charset="-122"/>
                 <a:cs typeface="Cambria" pitchFamily="34" charset="-120"/>
               </a:rPr>
-              <a:t>Implementation</a:t>
+              <a:t>What we built</a:t>
             </a:r>
             <a:endParaRPr lang="en-US" sz="3200" dirty="0"/>
           </a:p>
@@ -3321,7 +3324,7 @@
                 <a:ea typeface="Calibri" pitchFamily="34" charset="-122"/>
                 <a:cs typeface="Calibri" pitchFamily="34" charset="-120"/>
               </a:rPr>
-              <a:t>Node agent</a:t>
+              <a:t>Agent on each machine</a:t>
             </a:r>
             <a:endParaRPr lang="en-US" sz="1250" dirty="0"/>
           </a:p>
@@ -3360,7 +3363,7 @@
                 <a:ea typeface="Courier New" pitchFamily="34" charset="-122"/>
                 <a:cs typeface="Courier New" pitchFamily="34" charset="-120"/>
               </a:rPr>
-              <a:t>Go + C (CO-RE BPF)</a:t>
+              <a:t>Go and C</a:t>
             </a:r>
             <a:endParaRPr lang="en-US" sz="850" dirty="0"/>
           </a:p>
@@ -3402,7 +3405,7 @@
                 <a:ea typeface="Calibri" pitchFamily="34" charset="-122"/>
                 <a:cs typeface="Calibri" pitchFamily="34" charset="-120"/>
               </a:rPr>
-              <a:t>Privileged DaemonSet. Attaches tp_btf/tcp_probe and fentry/tcp_sendmsg, filtered to worker ports, and exports per-flow sRTT plus GPU state through a pluggable gpu.Reader (simulated / cputherm / nvml).</a:t>
+              <a:t>Runs on every machine with kernel access. Loads the eBPF programs, watches only the ports we care about, and reports network delay plus GPU state. GPU readings can be simulated, taken from CPU heat sensors, or read from a real NVIDIA card.</a:t>
             </a:r>
             <a:endParaRPr lang="en-US" sz="950" dirty="0"/>
           </a:p>
@@ -3500,7 +3503,7 @@
                 <a:ea typeface="Calibri" pitchFamily="34" charset="-122"/>
                 <a:cs typeface="Calibri" pitchFamily="34" charset="-120"/>
               </a:rPr>
-              <a:t>Controller</a:t>
+              <a:t>Central controller</a:t>
             </a:r>
             <a:endParaRPr lang="en-US" sz="1250" dirty="0"/>
           </a:p>
@@ -3539,7 +3542,7 @@
                 <a:ea typeface="Courier New" pitchFamily="34" charset="-122"/>
                 <a:cs typeface="Courier New" pitchFamily="34" charset="-120"/>
               </a:rPr>
-              <a:t>Go, controller-runtime</a:t>
+              <a:t>Go</a:t>
             </a:r>
             <a:endParaRPr lang="en-US" sz="850" dirty="0"/>
           </a:p>
@@ -3581,7 +3584,7 @@
                 <a:ea typeface="Calibri" pitchFamily="34" charset="-122"/>
                 <a:cs typeface="Calibri" pitchFamily="34" charset="-120"/>
               </a:rPr>
-              <a:t>Aggregates telemetry, runs the Decider, writes assignments into the InferencePipeline CRD and pushes them to workers over gRPC. Watchdog forces repartition on a 3 s stale heartbeat.</a:t>
+              <a:t>Collects all the readings, runs the decider, saves the plan in Kubernetes and sends it to the machines. A watchdog forces a re-cut if a machine goes quiet for 3 seconds.</a:t>
             </a:r>
             <a:endParaRPr lang="en-US" sz="950" dirty="0"/>
           </a:p>
@@ -3679,7 +3682,7 @@
                 <a:ea typeface="Calibri" pitchFamily="34" charset="-122"/>
                 <a:cs typeface="Calibri" pitchFamily="34" charset="-120"/>
               </a:rPr>
-              <a:t>Workers + router</a:t>
+              <a:t>Workers and router</a:t>
             </a:r>
             <a:endParaRPr lang="en-US" sz="1250" dirty="0"/>
           </a:p>
@@ -3760,7 +3763,7 @@
                 <a:ea typeface="Calibri" pitchFamily="34" charset="-122"/>
                 <a:cs typeface="Calibri" pitchFamily="34" charset="-120"/>
               </a:rPr>
-              <a:t>Stateless shard servers with pluggable sim and gpt2 backends, on WORKER_DEVICE=auto|cuda|cpu. The router drives stages hub-and-spoke and replays context on a generation mismatch.</a:t>
+              <a:t>Each worker holds a block of layers and keeps no state. Two backends: a fake one for testing, and real GPT-2. Runs on CPU or GPU. The router sends each request through the machines in order.</a:t>
             </a:r>
             <a:endParaRPr lang="en-US" sz="950" dirty="0"/>
           </a:p>
@@ -3858,7 +3861,7 @@
                 <a:ea typeface="Calibri" pitchFamily="34" charset="-122"/>
                 <a:cs typeface="Calibri" pitchFamily="34" charset="-120"/>
               </a:rPr>
-              <a:t>Benchmark harness</a:t>
+              <a:t>Test harness</a:t>
             </a:r>
             <a:endParaRPr lang="en-US" sz="1250" dirty="0"/>
           </a:p>
@@ -3939,7 +3942,7 @@
                 <a:ea typeface="Calibri" pitchFamily="34" charset="-122"/>
                 <a:cs typeface="Calibri" pitchFamily="34" charset="-120"/>
               </a:rPr>
-              <a:t>Five fault scenarios x three modes, measuring bubble time, tokens/s and TTFT; plus a hysteresis sweep and a predicted-vs-measured fidelity check.</a:t>
+              <a:t>Five fault situations x three modes. Measures idle time, tokens per second, and time to the first word. Also tries different brake settings.</a:t>
             </a:r>
             <a:endParaRPr lang="en-US" sz="950" dirty="0"/>
           </a:p>
@@ -4012,7 +4015,7 @@
                 <a:ea typeface="Calibri" pitchFamily="34" charset="-122"/>
                 <a:cs typeface="Calibri" pitchFamily="34" charset="-120"/>
               </a:rPr>
-              <a:t>Deployment reality</a:t>
+              <a:t>What is real, what is not</a:t>
             </a:r>
             <a:endParaRPr lang="en-US" sz="1200" dirty="0"/>
           </a:p>
@@ -4079,7 +4082,7 @@
                 <a:ea typeface="Calibri" pitchFamily="34" charset="-122"/>
                 <a:cs typeface="Calibri" pitchFamily="34" charset="-120"/>
               </a:rPr>
-              <a:t>eBPF is real, not simulated - CO-RE against the host BTF, loaded with cilium/ebpf.</a:t>
+              <a:t>The eBPF part is real, not simulated. It is built against the running kernel and loaded into it.</a:t>
             </a:r>
             <a:endParaRPr lang="en-US" sz="950" dirty="0"/>
           </a:p>
@@ -4146,7 +4149,7 @@
                 <a:ea typeface="Calibri" pitchFamily="34" charset="-122"/>
                 <a:cs typeface="Calibri" pitchFamily="34" charset="-120"/>
               </a:rPr>
-              <a:t>kind gives one host: real eBPF, loopback network, simulated GPU.</a:t>
+              <a:t>On a single test host you get real eBPF, but a fake network and a fake GPU.</a:t>
             </a:r>
             <a:endParaRPr lang="en-US" sz="950" dirty="0"/>
           </a:p>
@@ -4213,7 +4216,7 @@
                 <a:ea typeface="Calibri" pitchFamily="34" charset="-122"/>
                 <a:cs typeface="Calibri" pitchFamily="34" charset="-120"/>
               </a:rPr>
-              <a:t>k3s scripts turn laptops and GPU boxes on a LAN into the same cluster with zero YAML editing.</a:t>
+              <a:t>Our scripts turn a few laptops and GPU boxes on the same network into one cluster, with no config editing.</a:t>
             </a:r>
             <a:endParaRPr lang="en-US" sz="950" dirty="0"/>
           </a:p>
@@ -4280,7 +4283,7 @@
                 <a:ea typeface="Calibri" pitchFamily="34" charset="-122"/>
                 <a:cs typeface="Calibri" pitchFamily="34" charset="-120"/>
               </a:rPr>
-              <a:t>GPU_MODE=nvml on NVIDIA nodes; GPU_MODE=cputherm reads /sys/class/thermal on GPU-less laptops.</a:t>
+              <a:t>Real NVIDIA readings on GPU machines; real CPU heat readings on laptops with no GPU.</a:t>
             </a:r>
             <a:endParaRPr lang="en-US" sz="950" dirty="0"/>
           </a:p>
@@ -4347,7 +4350,7 @@
                 <a:ea typeface="Calibri" pitchFamily="34" charset="-122"/>
                 <a:cs typeface="Calibri" pitchFamily="34" charset="-120"/>
               </a:rPr>
-              <a:t>Distributed GPT-2 output is token-identical to single-process HuggingFace.</a:t>
+              <a:t>The split-up GPT-2 gives exactly the same text as running it on one machine.</a:t>
             </a:r>
             <a:endParaRPr lang="en-US" sz="950" dirty="0"/>
           </a:p>
@@ -4496,7 +4499,7 @@
                 <a:ea typeface="Cambria" pitchFamily="34" charset="-122"/>
                 <a:cs typeface="Cambria" pitchFamily="34" charset="-120"/>
               </a:rPr>
-              <a:t>Bottleneck-stage cost under injected faults</a:t>
+              <a:t>How slow the busiest machine gets</a:t>
             </a:r>
             <a:endParaRPr lang="en-US" sz="3200" dirty="0"/>
           </a:p>
@@ -4627,7 +4630,7 @@
                 <a:ea typeface="Calibri" pitchFamily="34" charset="-122"/>
                 <a:cs typeface="Calibri" pitchFamily="34" charset="-120"/>
               </a:rPr>
-              <a:t>vs both baselines</a:t>
+              <a:t>better than both</a:t>
             </a:r>
             <a:endParaRPr lang="en-US" sz="1000" dirty="0"/>
           </a:p>
@@ -4647,7 +4650,7 @@
                 <a:ea typeface="Calibri" pitchFamily="34" charset="-122"/>
                 <a:cs typeface="Calibri" pitchFamily="34" charset="-120"/>
               </a:rPr>
-              <a:t>under thermal throttle</a:t>
+              <a:t>when a machine gets hot</a:t>
             </a:r>
             <a:endParaRPr lang="en-US" sz="1000" dirty="0"/>
           </a:p>
@@ -4762,7 +4765,7 @@
                 <a:ea typeface="Calibri" pitchFamily="34" charset="-122"/>
                 <a:cs typeface="Calibri" pitchFamily="34" charset="-120"/>
               </a:rPr>
-              <a:t>vs both baselines</a:t>
+              <a:t>better than both</a:t>
             </a:r>
             <a:endParaRPr lang="en-US" sz="1000" dirty="0"/>
           </a:p>
@@ -4782,7 +4785,7 @@
                 <a:ea typeface="Calibri" pitchFamily="34" charset="-122"/>
                 <a:cs typeface="Calibri" pitchFamily="34" charset="-120"/>
               </a:rPr>
-              <a:t>under link degradation</a:t>
+              <a:t>when the network slows</a:t>
             </a:r>
             <a:endParaRPr lang="en-US" sz="1000" dirty="0"/>
           </a:p>
@@ -4897,7 +4900,7 @@
                 <a:ea typeface="Calibri" pitchFamily="34" charset="-122"/>
                 <a:cs typeface="Calibri" pitchFamily="34" charset="-120"/>
               </a:rPr>
-              <a:t>vs both baselines</a:t>
+              <a:t>better than both</a:t>
             </a:r>
             <a:endParaRPr lang="en-US" sz="1000" dirty="0"/>
           </a:p>
@@ -4917,7 +4920,7 @@
                 <a:ea typeface="Calibri" pitchFamily="34" charset="-122"/>
                 <a:cs typeface="Calibri" pitchFamily="34" charset="-120"/>
               </a:rPr>
-              <a:t>when the two coincide</a:t>
+              <a:t>when both happen at once</a:t>
             </a:r>
             <a:endParaRPr lang="en-US" sz="1000" dirty="0"/>
           </a:p>
@@ -4993,7 +4996,7 @@
                 <a:ea typeface="Calibri" pitchFamily="34" charset="-122"/>
                 <a:cs typeface="Calibri" pitchFamily="34" charset="-120"/>
               </a:rPr>
-              <a:t>Node failure: the static split is undefined over a worker set that no longer exists - the pipeline stops. KubeEdgeInfer heals to 62 ms.</a:t>
+              <a:t>When a machine dies, the fixed cut has no plan for the machines left, so everything stops. Ours re-cuts and keeps going at 62 ms.</a:t>
             </a:r>
             <a:endParaRPr lang="en-US" sz="950" dirty="0"/>
           </a:p>
@@ -5032,7 +5035,7 @@
                 <a:ea typeface="Calibri" pitchFamily="34" charset="-122"/>
                 <a:cs typeface="Calibri" pitchFamily="34" charset="-120"/>
               </a:rPr>
-              <a:t>Partitioner-level evaluation via bench/dpsim (N=12 layers, K=3 stages, 10 ms/layer, 0.4x throttle, 80 ms netem).</a:t>
+              <a:t>Measured with bench/dpsim: 12 layers, 3 machines, 10 ms per layer, one machine slowed to 0.4x, 80 ms network delay.</a:t>
             </a:r>
             <a:endParaRPr lang="en-US" sz="950" dirty="0"/>
           </a:p>
@@ -5181,7 +5184,7 @@
                 <a:ea typeface="Cambria" pitchFamily="34" charset="-122"/>
                 <a:cs typeface="Cambria" pitchFamily="34" charset="-120"/>
               </a:rPr>
-              <a:t>What the partitioner actually does</a:t>
+              <a:t>What the solver actually decides</a:t>
             </a:r>
             <a:endParaRPr lang="en-US" sz="3200" dirty="0"/>
           </a:p>
@@ -5254,7 +5257,7 @@
                 <a:ea typeface="Calibri" pitchFamily="34" charset="-122"/>
                 <a:cs typeface="Calibri" pitchFamily="34" charset="-120"/>
               </a:rPr>
-              <a:t>Baseline</a:t>
+              <a:t>All machines healthy</a:t>
             </a:r>
             <a:endParaRPr lang="en-US" sz="1150" dirty="0"/>
           </a:p>
@@ -5293,7 +5296,7 @@
                 <a:ea typeface="Courier New" pitchFamily="34" charset="-122"/>
                 <a:cs typeface="Courier New" pitchFamily="34" charset="-120"/>
               </a:rPr>
-              <a:t>3 healthy stages</a:t>
+              <a:t>3 machines, all fine</a:t>
             </a:r>
             <a:endParaRPr lang="en-US" sz="850" dirty="0"/>
           </a:p>
@@ -5603,7 +5606,7 @@
                 <a:ea typeface="Calibri" pitchFamily="34" charset="-122"/>
                 <a:cs typeface="Calibri" pitchFamily="34" charset="-120"/>
               </a:rPr>
-              <a:t>Thermal throttle on stage 2</a:t>
+              <a:t>Machine 2 gets hot</a:t>
             </a:r>
             <a:endParaRPr lang="en-US" sz="1150" dirty="0"/>
           </a:p>
@@ -5642,7 +5645,7 @@
                 <a:ea typeface="Courier New" pitchFamily="34" charset="-122"/>
                 <a:cs typeface="Courier New" pitchFamily="34" charset="-120"/>
               </a:rPr>
-              <a:t>speed 1.0 -&gt; 0.4</a:t>
+              <a:t>speed drops to 0.4x</a:t>
             </a:r>
             <a:endParaRPr lang="en-US" sz="850" dirty="0"/>
           </a:p>
@@ -5952,7 +5955,7 @@
                 <a:ea typeface="Calibri" pitchFamily="34" charset="-122"/>
                 <a:cs typeface="Calibri" pitchFamily="34" charset="-120"/>
               </a:rPr>
-              <a:t>80 ms delay on the hop into stage 2</a:t>
+              <a:t>Network to machine 2 slows down</a:t>
             </a:r>
             <a:endParaRPr lang="en-US" sz="1150" dirty="0"/>
           </a:p>
@@ -5991,7 +5994,7 @@
                 <a:ea typeface="Courier New" pitchFamily="34" charset="-122"/>
                 <a:cs typeface="Courier New" pitchFamily="34" charset="-120"/>
               </a:rPr>
-              <a:t>link 2 -&gt; 82 ms</a:t>
+              <a:t>delay 2 ms -&gt; 82 ms</a:t>
             </a:r>
             <a:endParaRPr lang="en-US" sz="850" dirty="0"/>
           </a:p>
@@ -6301,7 +6304,7 @@
                 <a:ea typeface="Calibri" pitchFamily="34" charset="-122"/>
                 <a:cs typeface="Calibri" pitchFamily="34" charset="-120"/>
               </a:rPr>
-              <a:t>Stage 3 lost</a:t>
+              <a:t>Machine 3 dies</a:t>
             </a:r>
             <a:endParaRPr lang="en-US" sz="1150" dirty="0"/>
           </a:p>
@@ -6340,7 +6343,7 @@
                 <a:ea typeface="Courier New" pitchFamily="34" charset="-122"/>
                 <a:cs typeface="Courier New" pitchFamily="34" charset="-120"/>
               </a:rPr>
-              <a:t>3 workers -&gt; 2</a:t>
+              <a:t>3 machines -&gt; 2</a:t>
             </a:r>
             <a:endParaRPr lang="en-US" sz="850" dirty="0"/>
           </a:p>
@@ -6550,7 +6553,7 @@
                 <a:ea typeface="Calibri" pitchFamily="34" charset="-122"/>
                 <a:cs typeface="Calibri" pitchFamily="34" charset="-120"/>
               </a:rPr>
-              <a:t>layer ranges assigned to stage 1 / 2 / 3</a:t>
+              <a:t>layers given to machine 1 / 2 / 3</a:t>
             </a:r>
             <a:endParaRPr lang="en-US" sz="850" dirty="0"/>
           </a:p>
@@ -6623,7 +6626,7 @@
                 <a:ea typeface="Calibri" pitchFamily="34" charset="-122"/>
                 <a:cs typeface="Calibri" pitchFamily="34" charset="-120"/>
               </a:rPr>
-              <a:t>Stage bypass</a:t>
+              <a:t>It can skip a machine</a:t>
             </a:r>
             <a:endParaRPr lang="en-US" sz="1250" dirty="0"/>
           </a:p>
@@ -6665,7 +6668,7 @@
                 <a:ea typeface="Calibri" pitchFamily="34" charset="-122"/>
                 <a:cs typeface="Calibri" pitchFamily="34" charset="-120"/>
               </a:rPr>
-              <a:t>Under an 80 ms link the DP assigns stage 2 an empty range. Because an empty stage costs nothing - not even its hop - the router skips it entirely, and the two remaining nodes absorb all 12 layers. The optimiser discovers node exclusion without any special-case rule for it.</a:t>
+              <a:t>When the network to machine 2 slows to 80 ms, the solver gives it zero layers. A machine with no layers costs nothing at all, so the router skips it and the other two take all 12 layers. Nobody told it to do this - it falls out of the maths.</a:t>
             </a:r>
             <a:endParaRPr lang="en-US" sz="1000" dirty="0"/>
           </a:p>
@@ -6729,7 +6732,7 @@
                 <a:ea typeface="Calibri" pitchFamily="34" charset="-122"/>
                 <a:cs typeface="Calibri" pitchFamily="34" charset="-120"/>
               </a:rPr>
-              <a:t>Optimality</a:t>
+              <a:t>It finds the best answer</a:t>
             </a:r>
             <a:endParaRPr lang="en-US" sz="1100" dirty="0"/>
           </a:p>
@@ -6771,7 +6774,7 @@
                 <a:ea typeface="Calibri" pitchFamily="34" charset="-122"/>
                 <a:cs typeface="Calibri" pitchFamily="34" charset="-120"/>
               </a:rPr>
-              <a:t>DP output matches brute force on 200 randomised instances.</a:t>
+              <a:t>The solver matched brute force on 200 random test cases.</a:t>
             </a:r>
             <a:endParaRPr lang="en-US" sz="900" dirty="0"/>
           </a:p>
@@ -6835,7 +6838,7 @@
                 <a:ea typeface="Calibri" pitchFamily="34" charset="-122"/>
                 <a:cs typeface="Calibri" pitchFamily="34" charset="-120"/>
               </a:rPr>
-              <a:t>Correctness</a:t>
+              <a:t>It gives the same answers</a:t>
             </a:r>
             <a:endParaRPr lang="en-US" sz="1100" dirty="0"/>
           </a:p>
@@ -6877,7 +6880,7 @@
                 <a:ea typeface="Calibri" pitchFamily="34" charset="-122"/>
                 <a:cs typeface="Calibri" pitchFamily="34" charset="-120"/>
               </a:rPr>
-              <a:t>3-stage distributed GPT-2 is token-identical to single-process greedy decoding.</a:t>
+              <a:t>GPT-2 split over 3 machines produces exactly the same text as one machine.</a:t>
             </a:r>
             <a:endParaRPr lang="en-US" sz="900" dirty="0"/>
           </a:p>
@@ -6941,7 +6944,7 @@
                 <a:ea typeface="Calibri" pitchFamily="34" charset="-122"/>
                 <a:cs typeface="Calibri" pitchFamily="34" charset="-120"/>
               </a:rPr>
-              <a:t>Model fidelity</a:t>
+              <a:t>How good the estimate is</a:t>
             </a:r>
             <a:endParaRPr lang="en-US" sz="1100" dirty="0"/>
           </a:p>
@@ -6983,7 +6986,7 @@
                 <a:ea typeface="Calibri" pitchFamily="34" charset="-122"/>
                 <a:cs typeface="Calibri" pitchFamily="34" charset="-120"/>
               </a:rPr>
-              <a:t>Predicted vs measured bottleneck tracks at a stable 3.0-3.24x ratio: a reliable ranking signal, not a calibrated latency.</a:t>
+              <a:t>Our predicted time is always about 3x lower than the real time. Good for ranking cuts, not for predicting real speed.</a:t>
             </a:r>
             <a:endParaRPr lang="en-US" sz="900" dirty="0"/>
           </a:p>
@@ -7022,7 +7025,7 @@
                 <a:ea typeface="Calibri" pitchFamily="34" charset="-122"/>
                 <a:cs typeface="Calibri" pitchFamily="34" charset="-120"/>
               </a:rPr>
-              <a:t>End-to-end tokens/s, TTFT and measured bubble time come from bench/run.py, which requires a live cluster.</a:t>
+              <a:t>Tokens per second, time to the first word, and real idle time come from bench/run.py, which needs a running cluster.</a:t>
             </a:r>
             <a:endParaRPr lang="en-US" sz="950" dirty="0"/>
           </a:p>
@@ -7171,7 +7174,7 @@
                 <a:ea typeface="Cambria" pitchFamily="34" charset="-122"/>
                 <a:cs typeface="Cambria" pitchFamily="34" charset="-120"/>
               </a:rPr>
-              <a:t>Against the closest systems</a:t>
+              <a:t>How we compare with the closest systems</a:t>
             </a:r>
             <a:endParaRPr lang="en-US" sz="3200" dirty="0"/>
           </a:p>
@@ -7583,7 +7586,7 @@
                 <a:ea typeface="Calibri" pitchFamily="34" charset="-122"/>
                 <a:cs typeface="Calibri" pitchFamily="34" charset="-120"/>
               </a:rPr>
-              <a:t>Parallelism</a:t>
+              <a:t>How the model is split</a:t>
             </a:r>
             <a:endParaRPr lang="en-US" sz="950" dirty="0"/>
           </a:p>
@@ -7622,7 +7625,7 @@
                 <a:ea typeface="Calibri" pitchFamily="34" charset="-122"/>
                 <a:cs typeface="Calibri" pitchFamily="34" charset="-120"/>
               </a:rPr>
-              <a:t>pipeline</a:t>
+              <a:t>by layer</a:t>
             </a:r>
             <a:endParaRPr lang="en-US" sz="950" dirty="0"/>
           </a:p>
@@ -7661,7 +7664,7 @@
                 <a:ea typeface="Calibri" pitchFamily="34" charset="-122"/>
                 <a:cs typeface="Calibri" pitchFamily="34" charset="-120"/>
               </a:rPr>
-              <a:t>tensor + sequence</a:t>
+              <a:t>inside layers</a:t>
             </a:r>
             <a:endParaRPr lang="en-US" sz="950" dirty="0"/>
           </a:p>
@@ -7700,7 +7703,7 @@
                 <a:ea typeface="Calibri" pitchFamily="34" charset="-122"/>
                 <a:cs typeface="Calibri" pitchFamily="34" charset="-120"/>
               </a:rPr>
-              <a:t>pipeline + routing</a:t>
+              <a:t>by layer + routing</a:t>
             </a:r>
             <a:endParaRPr lang="en-US" sz="950" dirty="0"/>
           </a:p>
@@ -7739,7 +7742,7 @@
                 <a:ea typeface="Calibri" pitchFamily="34" charset="-122"/>
                 <a:cs typeface="Calibri" pitchFamily="34" charset="-120"/>
               </a:rPr>
-              <a:t>pipelined ring</a:t>
+              <a:t>ring of layers</a:t>
             </a:r>
             <a:endParaRPr lang="en-US" sz="950" dirty="0"/>
           </a:p>
@@ -7778,7 +7781,7 @@
                 <a:ea typeface="Calibri" pitchFamily="34" charset="-122"/>
                 <a:cs typeface="Calibri" pitchFamily="34" charset="-120"/>
               </a:rPr>
-              <a:t>pipeline</a:t>
+              <a:t>by layer</a:t>
             </a:r>
             <a:endParaRPr lang="en-US" sz="950" dirty="0"/>
           </a:p>
@@ -7817,7 +7820,7 @@
                 <a:ea typeface="Calibri" pitchFamily="34" charset="-122"/>
                 <a:cs typeface="Calibri" pitchFamily="34" charset="-120"/>
               </a:rPr>
-              <a:t>Placement method</a:t>
+              <a:t>How the cut is chosen</a:t>
             </a:r>
             <a:endParaRPr lang="en-US" sz="950" dirty="0"/>
           </a:p>
@@ -7856,7 +7859,7 @@
                 <a:ea typeface="Calibri" pitchFamily="34" charset="-122"/>
                 <a:cs typeface="Calibri" pitchFamily="34" charset="-120"/>
               </a:rPr>
-              <a:t>DP (exact)</a:t>
+              <a:t>exact solver</a:t>
             </a:r>
             <a:endParaRPr lang="en-US" sz="950" dirty="0"/>
           </a:p>
@@ -7895,7 +7898,7 @@
                 <a:ea typeface="Calibri" pitchFamily="34" charset="-122"/>
                 <a:cs typeface="Calibri" pitchFamily="34" charset="-120"/>
               </a:rPr>
-              <a:t>heuristic planner</a:t>
+              <a:t>rule of thumb</a:t>
             </a:r>
             <a:endParaRPr lang="en-US" sz="950" dirty="0"/>
           </a:p>
@@ -7934,7 +7937,7 @@
                 <a:ea typeface="Calibri" pitchFamily="34" charset="-122"/>
                 <a:cs typeface="Calibri" pitchFamily="34" charset="-120"/>
               </a:rPr>
-              <a:t>MILP on max-flow</a:t>
+              <a:t>heavy solver</a:t>
             </a:r>
             <a:endParaRPr lang="en-US" sz="950" dirty="0"/>
           </a:p>
@@ -7973,7 +7976,7 @@
                 <a:ea typeface="Calibri" pitchFamily="34" charset="-122"/>
                 <a:cs typeface="Calibri" pitchFamily="34" charset="-120"/>
               </a:rPr>
-              <a:t>Halda scheduler</a:t>
+              <a:t>custom scheduler</a:t>
             </a:r>
             <a:endParaRPr lang="en-US" sz="950" dirty="0"/>
           </a:p>
@@ -8012,7 +8015,7 @@
                 <a:ea typeface="Calibri" pitchFamily="34" charset="-122"/>
                 <a:cs typeface="Calibri" pitchFamily="34" charset="-120"/>
               </a:rPr>
-              <a:t>DP (exact)</a:t>
+              <a:t>exact solver</a:t>
             </a:r>
             <a:endParaRPr lang="en-US" sz="950" dirty="0"/>
           </a:p>
@@ -8076,7 +8079,7 @@
                 <a:ea typeface="Calibri" pitchFamily="34" charset="-122"/>
                 <a:cs typeface="Calibri" pitchFamily="34" charset="-120"/>
               </a:rPr>
-              <a:t>Telemetry source</a:t>
+              <a:t>Where its numbers come from</a:t>
             </a:r>
             <a:endParaRPr lang="en-US" sz="950" dirty="0"/>
           </a:p>
@@ -8115,7 +8118,7 @@
                 <a:ea typeface="Calibri" pitchFamily="34" charset="-122"/>
                 <a:cs typeface="Calibri" pitchFamily="34" charset="-120"/>
               </a:rPr>
-              <a:t>offline profile</a:t>
+              <a:t>measured before</a:t>
             </a:r>
             <a:endParaRPr lang="en-US" sz="950" dirty="0"/>
           </a:p>
@@ -8154,7 +8157,7 @@
                 <a:ea typeface="Calibri" pitchFamily="34" charset="-122"/>
                 <a:cs typeface="Calibri" pitchFamily="34" charset="-120"/>
               </a:rPr>
-              <a:t>offline profile</a:t>
+              <a:t>measured before</a:t>
             </a:r>
             <a:endParaRPr lang="en-US" sz="950" dirty="0"/>
           </a:p>
@@ -8193,7 +8196,7 @@
                 <a:ea typeface="Calibri" pitchFamily="34" charset="-122"/>
                 <a:cs typeface="Calibri" pitchFamily="34" charset="-120"/>
               </a:rPr>
-              <a:t>cluster profile</a:t>
+              <a:t>measured before</a:t>
             </a:r>
             <a:endParaRPr lang="en-US" sz="950" dirty="0"/>
           </a:p>
@@ -8232,7 +8235,7 @@
                 <a:ea typeface="Calibri" pitchFamily="34" charset="-122"/>
                 <a:cs typeface="Calibri" pitchFamily="34" charset="-120"/>
               </a:rPr>
-              <a:t>device capability</a:t>
+              <a:t>device specs</a:t>
             </a:r>
             <a:endParaRPr lang="en-US" sz="950" dirty="0"/>
           </a:p>
@@ -8271,7 +8274,7 @@
                 <a:ea typeface="Calibri" pitchFamily="34" charset="-122"/>
                 <a:cs typeface="Calibri" pitchFamily="34" charset="-120"/>
               </a:rPr>
-              <a:t>eBPF + NVML, live</a:t>
+              <a:t>kernel + GPU, live</a:t>
             </a:r>
             <a:endParaRPr lang="en-US" sz="950" dirty="0"/>
           </a:p>
@@ -8310,7 +8313,7 @@
                 <a:ea typeface="Calibri" pitchFamily="34" charset="-122"/>
                 <a:cs typeface="Calibri" pitchFamily="34" charset="-120"/>
               </a:rPr>
-              <a:t>Re-plan while serving</a:t>
+              <a:t>Re-cuts while running</a:t>
             </a:r>
             <a:endParaRPr lang="en-US" sz="950" dirty="0"/>
           </a:p>
@@ -8427,7 +8430,7 @@
                 <a:ea typeface="Calibri" pitchFamily="34" charset="-122"/>
                 <a:cs typeface="Calibri" pitchFamily="34" charset="-120"/>
               </a:rPr>
-              <a:t>routing only</a:t>
+              <a:t>only routing</a:t>
             </a:r>
             <a:endParaRPr lang="en-US" sz="950" dirty="0"/>
           </a:p>
@@ -8505,7 +8508,7 @@
                 <a:ea typeface="Calibri" pitchFamily="34" charset="-122"/>
                 <a:cs typeface="Calibri" pitchFamily="34" charset="-120"/>
               </a:rPr>
-              <a:t>every 2 s</a:t>
+              <a:t>every 2 seconds</a:t>
             </a:r>
             <a:endParaRPr lang="en-US" sz="950" dirty="0"/>
           </a:p>
@@ -8569,7 +8572,7 @@
                 <a:ea typeface="Calibri" pitchFamily="34" charset="-122"/>
                 <a:cs typeface="Calibri" pitchFamily="34" charset="-120"/>
               </a:rPr>
-              <a:t>Handles thermal drift</a:t>
+              <a:t>Reacts to machines getting hot</a:t>
             </a:r>
             <a:endParaRPr lang="en-US" sz="950" dirty="0"/>
           </a:p>
@@ -8803,7 +8806,7 @@
                 <a:ea typeface="Calibri" pitchFamily="34" charset="-122"/>
                 <a:cs typeface="Calibri" pitchFamily="34" charset="-120"/>
               </a:rPr>
-              <a:t>Handles node loss</a:t>
+              <a:t>Survives a machine dying</a:t>
             </a:r>
             <a:endParaRPr lang="en-US" sz="950" dirty="0"/>
           </a:p>
@@ -8920,7 +8923,7 @@
                 <a:ea typeface="Calibri" pitchFamily="34" charset="-122"/>
                 <a:cs typeface="Calibri" pitchFamily="34" charset="-120"/>
               </a:rPr>
-              <a:t>replication</a:t>
+              <a:t>by keeping copies</a:t>
             </a:r>
             <a:endParaRPr lang="en-US" sz="950" dirty="0"/>
           </a:p>
@@ -8998,7 +9001,7 @@
                 <a:ea typeface="Calibri" pitchFamily="34" charset="-122"/>
                 <a:cs typeface="Calibri" pitchFamily="34" charset="-120"/>
               </a:rPr>
-              <a:t>yes, 3 s watchdog</a:t>
+              <a:t>yes, within 3 seconds</a:t>
             </a:r>
             <a:endParaRPr lang="en-US" sz="950" dirty="0"/>
           </a:p>
@@ -9062,7 +9065,7 @@
                 <a:ea typeface="Calibri" pitchFamily="34" charset="-122"/>
                 <a:cs typeface="Calibri" pitchFamily="34" charset="-120"/>
               </a:rPr>
-              <a:t>Target hardware</a:t>
+              <a:t>What it runs on</a:t>
             </a:r>
             <a:endParaRPr lang="en-US" sz="950" dirty="0"/>
           </a:p>
@@ -9101,7 +9104,7 @@
                 <a:ea typeface="Calibri" pitchFamily="34" charset="-122"/>
                 <a:cs typeface="Calibri" pitchFamily="34" charset="-120"/>
               </a:rPr>
-              <a:t>15 edge devices</a:t>
+              <a:t>15 small devices</a:t>
             </a:r>
             <a:endParaRPr lang="en-US" sz="950" dirty="0"/>
           </a:p>
@@ -9140,7 +9143,7 @@
                 <a:ea typeface="Calibri" pitchFamily="34" charset="-122"/>
                 <a:cs typeface="Calibri" pitchFamily="34" charset="-120"/>
               </a:rPr>
-              <a:t>edge devices</a:t>
+              <a:t>small devices</a:t>
             </a:r>
             <a:endParaRPr lang="en-US" sz="950" dirty="0"/>
           </a:p>
@@ -9179,7 +9182,7 @@
                 <a:ea typeface="Calibri" pitchFamily="34" charset="-122"/>
                 <a:cs typeface="Calibri" pitchFamily="34" charset="-120"/>
               </a:rPr>
-              <a:t>24-42 GPU nodes</a:t>
+              <a:t>24-42 GPU servers</a:t>
             </a:r>
             <a:endParaRPr lang="en-US" sz="950" dirty="0"/>
           </a:p>
@@ -9218,7 +9221,7 @@
                 <a:ea typeface="Calibri" pitchFamily="34" charset="-122"/>
                 <a:cs typeface="Calibri" pitchFamily="34" charset="-120"/>
               </a:rPr>
-              <a:t>home cluster</a:t>
+              <a:t>home machines</a:t>
             </a:r>
             <a:endParaRPr lang="en-US" sz="950" dirty="0"/>
           </a:p>
@@ -9257,7 +9260,7 @@
                 <a:ea typeface="Calibri" pitchFamily="34" charset="-122"/>
                 <a:cs typeface="Calibri" pitchFamily="34" charset="-120"/>
               </a:rPr>
-              <a:t>consumer edge + k3s</a:t>
+              <a:t>laptops + GPU boxes</a:t>
             </a:r>
             <a:endParaRPr lang="en-US" sz="950" dirty="0"/>
           </a:p>
@@ -9296,7 +9299,7 @@
                 <a:ea typeface="Calibri" pitchFamily="34" charset="-122"/>
                 <a:cs typeface="Calibri" pitchFamily="34" charset="-120"/>
               </a:rPr>
-              <a:t>Reported gain</a:t>
+              <a:t>Improvement they report</a:t>
             </a:r>
             <a:endParaRPr lang="en-US" sz="950" dirty="0"/>
           </a:p>
@@ -9335,7 +9338,7 @@
                 <a:ea typeface="Calibri" pitchFamily="34" charset="-122"/>
                 <a:cs typeface="Calibri" pitchFamily="34" charset="-120"/>
               </a:rPr>
-              <a:t>50% latency</a:t>
+              <a:t>50% less delay</a:t>
             </a:r>
             <a:endParaRPr lang="en-US" sz="950" dirty="0"/>
           </a:p>
@@ -9374,7 +9377,7 @@
                 <a:ea typeface="Calibri" pitchFamily="34" charset="-122"/>
                 <a:cs typeface="Calibri" pitchFamily="34" charset="-120"/>
               </a:rPr>
-              <a:t>2.5x latency</a:t>
+              <a:t>2.5x less delay</a:t>
             </a:r>
             <a:endParaRPr lang="en-US" sz="950" dirty="0"/>
           </a:p>
@@ -9413,7 +9416,7 @@
                 <a:ea typeface="Calibri" pitchFamily="34" charset="-122"/>
                 <a:cs typeface="Calibri" pitchFamily="34" charset="-120"/>
               </a:rPr>
-              <a:t>3.3x throughput</a:t>
+              <a:t>3.3x more work</a:t>
             </a:r>
             <a:endParaRPr lang="en-US" sz="950" dirty="0"/>
           </a:p>
@@ -9452,7 +9455,7 @@
                 <a:ea typeface="Calibri" pitchFamily="34" charset="-122"/>
                 <a:cs typeface="Calibri" pitchFamily="34" charset="-120"/>
               </a:rPr>
-              <a:t>5-17x TPOT</a:t>
+              <a:t>5-17x faster words</a:t>
             </a:r>
             <a:endParaRPr lang="en-US" sz="950" dirty="0"/>
           </a:p>
@@ -9491,7 +9494,7 @@
                 <a:ea typeface="Calibri" pitchFamily="34" charset="-122"/>
                 <a:cs typeface="Calibri" pitchFamily="34" charset="-120"/>
               </a:rPr>
-              <a:t>49-66% bottleneck*</a:t>
+              <a:t>49-66% better*</a:t>
             </a:r>
             <a:endParaRPr lang="en-US" sz="950" dirty="0"/>
           </a:p>
@@ -9559,7 +9562,7 @@
                 <a:ea typeface="Calibri" pitchFamily="34" charset="-122"/>
                 <a:cs typeface="Calibri" pitchFamily="34" charset="-120"/>
               </a:rPr>
-              <a:t>* Bottleneck-stage cost vs a static split and a profile-once ablation; not directly comparable to the end-to-end figures in the other columns.</a:t>
+              <a:t>* We measure how slow the busiest machine gets, against a fixed cut and a measure-once version of our own system. That is not the same measurement as the other columns.</a:t>
             </a:r>
             <a:endParaRPr lang="en-US" sz="950" dirty="0"/>
           </a:p>
@@ -9736,7 +9739,7 @@
                 <a:ea typeface="Cambria" pitchFamily="34" charset="-122"/>
                 <a:cs typeface="Cambria" pitchFamily="34" charset="-120"/>
               </a:rPr>
-              <a:t>The split point should be a control variable, not a deployment constant.</a:t>
+              <a:t>Where to cut the model is a decision you should keep making, not one you make once.</a:t>
             </a:r>
             <a:endParaRPr lang="en-US" sz="2800" dirty="0"/>
           </a:p>
@@ -9778,7 +9781,7 @@
                 <a:ea typeface="Calibri" pitchFamily="34" charset="-122"/>
                 <a:cs typeface="Calibri" pitchFamily="34" charset="-120"/>
               </a:rPr>
-              <a:t>KubeEdgeInfer keeps a classical exact partitioner permanently in the loop, fed by kernel-measured latency and real thermal state, and applies its decisions to a running pipeline without a restart. On a heterogeneous edge cluster that is the difference between a plan that was right once and a plan that stays right.</a:t>
+              <a:t>We keep a standard, exact solver running all the time. It is fed by network delays read from the kernel and by real temperature readings, and it moves layers on a live system with no restart. On a set of ordinary machines, that is the difference between a plan that was right once and a plan that stays right.</a:t>
             </a:r>
             <a:endParaRPr lang="en-US" sz="1300" dirty="0"/>
           </a:p>
@@ -9881,7 +9884,7 @@
                 <a:ea typeface="Calibri" pitchFamily="34" charset="-122"/>
                 <a:cs typeface="Calibri" pitchFamily="34" charset="-120"/>
               </a:rPr>
-              <a:t>Exactness is cheap</a:t>
+              <a:t>The exact answer is cheap</a:t>
             </a:r>
             <a:endParaRPr lang="en-US" sz="1200" dirty="0"/>
           </a:p>
@@ -9923,7 +9926,7 @@
                 <a:ea typeface="Calibri" pitchFamily="34" charset="-122"/>
                 <a:cs typeface="Calibri" pitchFamily="34" charset="-120"/>
               </a:rPr>
-              <a:t>The DP costs microseconds; there is no reason to solve it only once.</a:t>
+              <a:t>Working out the best cut takes microseconds. There is no reason to do it only once.</a:t>
             </a:r>
             <a:endParaRPr lang="en-US" sz="1000" dirty="0"/>
           </a:p>
@@ -10026,7 +10029,7 @@
                 <a:ea typeface="Calibri" pitchFamily="34" charset="-122"/>
                 <a:cs typeface="Calibri" pitchFamily="34" charset="-120"/>
               </a:rPr>
-              <a:t>Hysteresis is what makes it usable</a:t>
+              <a:t>The brakes are what make it usable</a:t>
             </a:r>
             <a:endParaRPr lang="en-US" sz="1200" dirty="0"/>
           </a:p>
@@ -10068,7 +10071,7 @@
                 <a:ea typeface="Calibri" pitchFamily="34" charset="-122"/>
                 <a:cs typeface="Calibri" pitchFamily="34" charset="-120"/>
               </a:rPr>
-              <a:t>One improvement threshold and one cooldown tame thermal, network and failure triggers alike.</a:t>
+              <a:t>One 'must be clearly better' rule and one 'wait a bit' rule handle heat, network and machine failure all the same way.</a:t>
             </a:r>
             <a:endParaRPr lang="en-US" sz="1000" dirty="0"/>
           </a:p>
@@ -10171,7 +10174,7 @@
                 <a:ea typeface="Calibri" pitchFamily="34" charset="-122"/>
                 <a:cs typeface="Calibri" pitchFamily="34" charset="-120"/>
               </a:rPr>
-              <a:t>Kernel telemetry needs no instrumentation</a:t>
+              <a:t>Kernel measuring is free</a:t>
             </a:r>
             <a:endParaRPr lang="en-US" sz="1200" dirty="0"/>
           </a:p>
@@ -10213,7 +10216,7 @@
                 <a:ea typeface="Calibri" pitchFamily="34" charset="-122"/>
                 <a:cs typeface="Calibri" pitchFamily="34" charset="-120"/>
               </a:rPr>
-              <a:t>eBPF measures the real transport, not what the application thinks it sent.</a:t>
+              <a:t>eBPF sees what really went over the network, not what the program thinks it sent.</a:t>
             </a:r>
             <a:endParaRPr lang="en-US" sz="1000" dirty="0"/>
           </a:p>
@@ -10279,7 +10282,7 @@
                 <a:ea typeface="Calibri" pitchFamily="34" charset="-122"/>
                 <a:cs typeface="Calibri" pitchFamily="34" charset="-120"/>
               </a:rPr>
-              <a:t>Future work</a:t>
+              <a:t>Next steps</a:t>
             </a:r>
             <a:endParaRPr lang="en-US" sz="1200" dirty="0"/>
           </a:p>
@@ -10346,7 +10349,7 @@
                 <a:ea typeface="Calibri" pitchFamily="34" charset="-122"/>
                 <a:cs typeface="Calibri" pitchFamily="34" charset="-120"/>
               </a:rPr>
-              <a:t>A Llama-class backend so two 8 GB cards hold a real modern LLM across stages.</a:t>
+              <a:t>Support a Llama-size model, so two 8 GB cards can hold a real modern model between them.</a:t>
             </a:r>
             <a:endParaRPr lang="en-US" sz="950" dirty="0"/>
           </a:p>
@@ -10413,7 +10416,7 @@
                 <a:ea typeface="Calibri" pitchFamily="34" charset="-122"/>
                 <a:cs typeface="Calibri" pitchFamily="34" charset="-120"/>
               </a:rPr>
-              <a:t>Sustained multi-tenant load to observe genuine NVML throttling, not just flat curves.</a:t>
+              <a:t>Run heavy load for a long time, to see a GPU really slow down instead of flat lines.</a:t>
             </a:r>
             <a:endParaRPr lang="en-US" sz="950" dirty="0"/>
           </a:p>
@@ -10480,7 +10483,7 @@
                 <a:ea typeface="Calibri" pitchFamily="34" charset="-122"/>
                 <a:cs typeface="Calibri" pitchFamily="34" charset="-120"/>
               </a:rPr>
-              <a:t>Non-contiguous and attention-head-level assignment, following arXiv:2505.02533.</a:t>
+              <a:t>Allow cuts that are not one solid block per machine, as in arXiv:2505.02533.</a:t>
             </a:r>
             <a:endParaRPr lang="en-US" sz="950" dirty="0"/>
           </a:p>
@@ -10547,7 +10550,7 @@
                 <a:ea typeface="Calibri" pitchFamily="34" charset="-122"/>
                 <a:cs typeface="Calibri" pitchFamily="34" charset="-120"/>
               </a:rPr>
-              <a:t>Calibrating the cost model so the DP's bottleneck becomes a latency prediction, not only a ranking.</a:t>
+              <a:t>Calibrate the cost estimate so it predicts real speed, not only the right ranking.</a:t>
             </a:r>
             <a:endParaRPr lang="en-US" sz="950" dirty="0"/>
           </a:p>
@@ -11250,7 +11253,7 @@
                 <a:ea typeface="Calibri" pitchFamily="34" charset="-122"/>
                 <a:cs typeface="Calibri" pitchFamily="34" charset="-120"/>
               </a:rPr>
-              <a:t>Tooling: cilium/ebpf (CO-RE loader) · Kubernetes controller-runtime · NVIDIA NVML · k3s · Hugging Face Transformers (GPT-2).</a:t>
+              <a:t>Tools used: cilium/ebpf · Kubernetes controller-runtime · NVIDIA NVML · k3s · Hugging Face Transformers (GPT-2).</a:t>
             </a:r>
             <a:endParaRPr lang="en-US" sz="900" dirty="0"/>
           </a:p>
@@ -11399,7 +11402,7 @@
                 <a:ea typeface="Cambria" pitchFamily="34" charset="-122"/>
                 <a:cs typeface="Cambria" pitchFamily="34" charset="-120"/>
               </a:rPr>
-              <a:t>Edge LLM inference is a moving target</a:t>
+              <a:t>The machines keep changing</a:t>
             </a:r>
             <a:endParaRPr lang="en-US" sz="3200" dirty="0"/>
           </a:p>
@@ -11536,7 +11539,7 @@
                 <a:ea typeface="Calibri" pitchFamily="34" charset="-122"/>
                 <a:cs typeface="Calibri" pitchFamily="34" charset="-120"/>
               </a:rPr>
-              <a:t>Why split at all</a:t>
+              <a:t>Why we split the model at all</a:t>
             </a:r>
             <a:endParaRPr lang="en-US" sz="1450" dirty="0"/>
           </a:p>
@@ -11578,7 +11581,7 @@
                 <a:ea typeface="Calibri" pitchFamily="34" charset="-122"/>
                 <a:cs typeface="Calibri" pitchFamily="34" charset="-120"/>
               </a:rPr>
-              <a:t>A 7B+ model does not fit on one consumer device. Pipeline parallelism spreads contiguous layer ranges across several machines, so the split point is the central performance decision.</a:t>
+              <a:t>A big AI model is too large for one laptop or small PC. So we cut it into blocks of layers and give one block to each machine. Where we cut is the most important choice we make.</a:t>
             </a:r>
             <a:endParaRPr lang="en-US" sz="1150" dirty="0"/>
           </a:p>
@@ -11715,7 +11718,7 @@
                 <a:ea typeface="Calibri" pitchFamily="34" charset="-122"/>
                 <a:cs typeface="Calibri" pitchFamily="34" charset="-120"/>
               </a:rPr>
-              <a:t>Why the edge is different</a:t>
+              <a:t>Small machines are not like data centres</a:t>
             </a:r>
             <a:endParaRPr lang="en-US" sz="1450" dirty="0"/>
           </a:p>
@@ -11757,7 +11760,7 @@
                 <a:ea typeface="Calibri" pitchFamily="34" charset="-122"/>
                 <a:cs typeface="Calibri" pitchFamily="34" charset="-120"/>
               </a:rPr>
-              <a:t>Datacenter schedulers assume stable, homogeneous, well-cooled nodes. An edge cluster is laptops and hobby GPU boxes on WiFi: they thermally throttle, their links wander, and they disappear.</a:t>
+              <a:t>Data centre servers are all the same and stay cool. Our machines are laptops and cheap GPU boxes on WiFi. They get hot and slow down, their network speed wanders, and sometimes they switch off.</a:t>
             </a:r>
             <a:endParaRPr lang="en-US" sz="1150" dirty="0"/>
           </a:p>
@@ -11894,7 +11897,7 @@
                 <a:ea typeface="Calibri" pitchFamily="34" charset="-122"/>
                 <a:cs typeface="Calibri" pitchFamily="34" charset="-120"/>
               </a:rPr>
-              <a:t>What existing frameworks do</a:t>
+              <a:t>What other systems do today</a:t>
             </a:r>
             <a:endParaRPr lang="en-US" sz="1450" dirty="0"/>
           </a:p>
@@ -11936,7 +11939,7 @@
                 <a:ea typeface="Calibri" pitchFamily="34" charset="-122"/>
                 <a:cs typeface="Calibri" pitchFamily="34" charset="-120"/>
               </a:rPr>
-              <a:t>They profile once, solve the placement problem once, and never revisit it. The plan is optimal for the machine state at t = 0 and progressively wrong afterwards.</a:t>
+              <a:t>They measure the machines once, pick a cut, and never look again. That cut is right at the start and gets more and more wrong as the machines change.</a:t>
             </a:r>
             <a:endParaRPr lang="en-US" sz="1150" dirty="0"/>
           </a:p>
@@ -12009,7 +12012,7 @@
                 <a:ea typeface="Calibri" pitchFamily="34" charset="-122"/>
                 <a:cs typeface="Calibri" pitchFamily="34" charset="-120"/>
               </a:rPr>
-              <a:t>The consequence</a:t>
+              <a:t>What that costs</a:t>
             </a:r>
             <a:endParaRPr lang="en-US" sz="1100" dirty="0"/>
           </a:p>
@@ -12090,7 +12093,7 @@
                 <a:ea typeface="Calibri" pitchFamily="34" charset="-122"/>
                 <a:cs typeface="Calibri" pitchFamily="34" charset="-120"/>
               </a:rPr>
-              <a:t>bottleneck-stage cost inflicted by a single throttled node under a frozen split</a:t>
+              <a:t>slower on the busiest machine when one machine gets hot and the cut never changes</a:t>
             </a:r>
             <a:endParaRPr lang="en-US" sz="1000" dirty="0"/>
           </a:p>
@@ -12171,7 +12174,7 @@
                 <a:ea typeface="Calibri" pitchFamily="34" charset="-122"/>
                 <a:cs typeface="Calibri" pitchFamily="34" charset="-120"/>
               </a:rPr>
-              <a:t>when a degraded link and a throttled GPU coincide</a:t>
+              <a:t>slower when a slow network and a hot GPU happen at the same time</a:t>
             </a:r>
             <a:endParaRPr lang="en-US" sz="1000" dirty="0"/>
           </a:p>
@@ -12252,7 +12255,7 @@
                 <a:ea typeface="Calibri" pitchFamily="34" charset="-122"/>
                 <a:cs typeface="Calibri" pitchFamily="34" charset="-120"/>
               </a:rPr>
-              <a:t>requests served once a node dies and nothing re-plans</a:t>
+              <a:t>answers given after one machine dies, if nothing is re-planned</a:t>
             </a:r>
             <a:endParaRPr lang="en-US" sz="1000" dirty="0"/>
           </a:p>
@@ -12291,7 +12294,7 @@
                 <a:ea typeface="Calibri" pitchFamily="34" charset="-122"/>
                 <a:cs typeface="Calibri" pitchFamily="34" charset="-120"/>
               </a:rPr>
-              <a:t>Figures from the partitioner-level evaluation on slide 11 (12 layers, 3 stages).</a:t>
+              <a:t>Numbers from the test on slide 11 (12 layers, 3 machines).</a:t>
             </a:r>
             <a:endParaRPr lang="en-US" sz="950" dirty="0"/>
           </a:p>
@@ -12440,7 +12443,7 @@
                 <a:ea typeface="Cambria" pitchFamily="34" charset="-122"/>
                 <a:cs typeface="Cambria" pitchFamily="34" charset="-120"/>
               </a:rPr>
-              <a:t>Partitioning and placement</a:t>
+              <a:t>How other systems split the model</a:t>
             </a:r>
             <a:endParaRPr lang="en-US" sz="3200" dirty="0"/>
           </a:p>
@@ -12633,7 +12636,7 @@
                 <a:ea typeface="Calibri" pitchFamily="34" charset="-122"/>
                 <a:cs typeface="Calibri" pitchFamily="34" charset="-120"/>
               </a:rPr>
-              <a:t>Joint device selection + layer partition by dynamic programming across collaborative edge devices. Up to 50% latency reduction, 2x throughput on Llama2 over 15 physical devices.</a:t>
+              <a:t>Picks which devices to use and where to cut, with an exact solver. Up to 50% less delay and 2x more work done, tested on 15 real devices.</a:t>
             </a:r>
             <a:endParaRPr lang="en-US" sz="1000" dirty="0"/>
           </a:p>
@@ -12700,7 +12703,7 @@
                 <a:ea typeface="Calibri" pitchFamily="34" charset="-122"/>
                 <a:cs typeface="Calibri" pitchFamily="34" charset="-120"/>
               </a:rPr>
-              <a:t>Profiles device speed and bandwidth offline; the DP runs on that static profile.</a:t>
+              <a:t>Measures the devices once, before running. The plan never changes after that.</a:t>
             </a:r>
             <a:endParaRPr lang="en-US" sz="950" dirty="0"/>
           </a:p>
@@ -12893,7 +12896,7 @@
                 <a:ea typeface="Calibri" pitchFamily="34" charset="-122"/>
                 <a:cs typeface="Calibri" pitchFamily="34" charset="-120"/>
               </a:rPr>
-              <a:t>Hybrid tensor/sequence parallelism for in-situ Transformer inference, with heterogeneity-aware planning and tile-based compute/communication overlap. Up to 2.5x lower latency.</a:t>
+              <a:t>Splits the work inside each layer instead of by layer, and overlaps computing with sending. Up to 2.5x less delay.</a:t>
             </a:r>
             <a:endParaRPr lang="en-US" sz="1000" dirty="0"/>
           </a:p>
@@ -12960,7 +12963,7 @@
                 <a:ea typeface="Calibri" pitchFamily="34" charset="-122"/>
                 <a:cs typeface="Calibri" pitchFamily="34" charset="-120"/>
               </a:rPr>
-              <a:t>Planning is a one-shot offline step; no runtime re-planning under drift.</a:t>
+              <a:t>The plan is made once, before running. Nothing is re-planned while it runs.</a:t>
             </a:r>
             <a:endParaRPr lang="en-US" sz="950" dirty="0"/>
           </a:p>
@@ -13153,7 +13156,7 @@
                 <a:ea typeface="Calibri" pitchFamily="34" charset="-122"/>
                 <a:cs typeface="Calibri" pitchFamily="34" charset="-120"/>
               </a:rPr>
-              <a:t>Models heterogeneous GPU serving as max-flow on a weighted graph and solves placement + request scheduling jointly by MILP. Up to 3.3x throughput on 24-42 node clusters.</a:t>
+              <a:t>Treats serving on mixed GPUs as a flow problem, and chooses placement and routing together. Up to 3.3x more work done on 24-42 machines.</a:t>
             </a:r>
             <a:endParaRPr lang="en-US" sz="1000" dirty="0"/>
           </a:p>
@@ -13220,7 +13223,7 @@
                 <a:ea typeface="Calibri" pitchFamily="34" charset="-122"/>
                 <a:cs typeface="Calibri" pitchFamily="34" charset="-120"/>
               </a:rPr>
-              <a:t>Datacenter-scale GPUs; MILP is too heavy for a seconds-scale control loop.</a:t>
+              <a:t>Built for data centre GPUs. Its solver is far too slow to re-run every few seconds.</a:t>
             </a:r>
             <a:endParaRPr lang="en-US" sz="950" dirty="0"/>
           </a:p>
@@ -13413,7 +13416,7 @@
                 <a:ea typeface="Calibri" pitchFamily="34" charset="-122"/>
                 <a:cs typeface="Calibri" pitchFamily="34" charset="-120"/>
               </a:rPr>
-              <a:t>Argues tensor parallelism beats pipeline on low-resource devices; sliding-window memory scheduler and star-based allreduce keep 70B-scale weights moving through small RAM.</a:t>
+              <a:t>Argues that splitting inside layers beats splitting by layer on small devices. Clever memory handling lets 70B models run in small RAM.</a:t>
             </a:r>
             <a:endParaRPr lang="en-US" sz="1000" dirty="0"/>
           </a:p>
@@ -13480,7 +13483,7 @@
                 <a:ea typeface="Calibri" pitchFamily="34" charset="-122"/>
                 <a:cs typeface="Calibri" pitchFamily="34" charset="-120"/>
               </a:rPr>
-              <a:t>Optimises memory and collectives, not adaptation to node degradation.</a:t>
+              <a:t>Improves memory use, but does not react when a machine slows down.</a:t>
             </a:r>
             <a:endParaRPr lang="en-US" sz="950" dirty="0"/>
           </a:p>
@@ -13673,7 +13676,7 @@
                 <a:ea typeface="Calibri" pitchFamily="34" charset="-122"/>
                 <a:cs typeface="Calibri" pitchFamily="34" charset="-120"/>
               </a:rPr>
-              <a:t>30-70B inference on real home clusters: Halda scheduler co-optimises CPU/GPU workload and device selection; pipelined-ring parallelism hides disk I/O. 5-17x lower TPOT than llama.cpp.</a:t>
+              <a:t>Runs 30-70B models on real home machines. Shares work between CPU and GPU and hides slow disk reads. 5-17x faster per token than llama.cpp.</a:t>
             </a:r>
             <a:endParaRPr lang="en-US" sz="1000" dirty="0"/>
           </a:p>
@@ -13740,7 +13743,7 @@
                 <a:ea typeface="Calibri" pitchFamily="34" charset="-122"/>
                 <a:cs typeface="Calibri" pitchFamily="34" charset="-120"/>
               </a:rPr>
-              <a:t>Scheduling is decided at load time from static device capability.</a:t>
+              <a:t>Decides the plan when loading, from fixed device specs.</a:t>
             </a:r>
             <a:endParaRPr lang="en-US" sz="950" dirty="0"/>
           </a:p>
@@ -13779,7 +13782,7 @@
                 <a:ea typeface="Calibri" pitchFamily="34" charset="-122"/>
                 <a:cs typeface="Calibri" pitchFamily="34" charset="-120"/>
               </a:rPr>
-              <a:t>Limitation relevant to this work</a:t>
+              <a:t>What it does not do</a:t>
             </a:r>
             <a:endParaRPr lang="en-US" sz="900" dirty="0"/>
           </a:p>
@@ -13857,7 +13860,7 @@
                 <a:ea typeface="Calibri" pitchFamily="34" charset="-122"/>
                 <a:cs typeface="Calibri" pitchFamily="34" charset="-120"/>
               </a:rPr>
-              <a:t>All ten works published 2024-2025; full citations on slide 15.</a:t>
+              <a:t>All ten papers are from 2024-2025. Full list on slide 15.</a:t>
             </a:r>
             <a:endParaRPr lang="en-US" sz="950" dirty="0"/>
           </a:p>
@@ -14006,7 +14009,7 @@
                 <a:ea typeface="Cambria" pitchFamily="34" charset="-122"/>
                 <a:cs typeface="Cambria" pitchFamily="34" charset="-120"/>
               </a:rPr>
-              <a:t>Adaptation, decentralisation, and eBPF as control</a:t>
+              <a:t>Adapting, sharing out, and eBPF as a control tool</a:t>
             </a:r>
             <a:endParaRPr lang="en-US" sz="3200" dirty="0"/>
           </a:p>
@@ -14199,7 +14202,7 @@
                 <a:ea typeface="Calibri" pitchFamily="34" charset="-122"/>
                 <a:cs typeface="Calibri" pitchFamily="34" charset="-120"/>
               </a:rPr>
-              <a:t>Partitions the decoder at attention-head granularity, co-locating each head with its K/V cache and migrating heads when memory tightens. Within 15-20% of an exact solver.</a:t>
+              <a:t>Cuts the model into much smaller pieces (single attention heads) and moves them when memory runs low. Within 15-20% of the best possible answer.</a:t>
             </a:r>
             <a:endParaRPr lang="en-US" sz="1000" dirty="0"/>
           </a:p>
@@ -14266,7 +14269,7 @@
                 <a:ea typeface="Calibri" pitchFamily="34" charset="-122"/>
                 <a:cs typeface="Calibri" pitchFamily="34" charset="-120"/>
               </a:rPr>
-              <a:t>Migration is triggered by memory pressure only - not thermal or network state.</a:t>
+              <a:t>Only reacts to memory running low - not to heat or to a slow network.</a:t>
             </a:r>
             <a:endParaRPr lang="en-US" sz="950" dirty="0"/>
           </a:p>
@@ -14459,7 +14462,7 @@
                 <a:ea typeface="Calibri" pitchFamily="34" charset="-122"/>
                 <a:cs typeface="Calibri" pitchFamily="34" charset="-120"/>
               </a:rPr>
-              <a:t>Inference service over a decentralised pool of volunteer, non-uniform machines, addressing placement and routing without a central trusted cluster.</a:t>
+              <a:t>Serves a model across a pool of volunteer machines of all shapes, with no central cluster in charge.</a:t>
             </a:r>
             <a:endParaRPr lang="en-US" sz="1000" dirty="0"/>
           </a:p>
@@ -14526,7 +14529,7 @@
                 <a:ea typeface="Calibri" pitchFamily="34" charset="-122"/>
                 <a:cs typeface="Calibri" pitchFamily="34" charset="-120"/>
               </a:rPr>
-              <a:t>Decentralised placement, but no kernel-level measurement substrate.</a:t>
+              <a:t>Spreads the work out well, but measures nothing inside the kernel.</a:t>
             </a:r>
             <a:endParaRPr lang="en-US" sz="950" dirty="0"/>
           </a:p>
@@ -14719,7 +14722,7 @@
                 <a:ea typeface="Calibri" pitchFamily="34" charset="-122"/>
                 <a:cs typeface="Calibri" pitchFamily="34" charset="-120"/>
               </a:rPr>
-              <a:t>Model-based reinforcement learning chooses the split point for wireless LLM inference as channel quality varies - explicitly an adaptive, not one-shot, formulation.</a:t>
+              <a:t>Learns where to cut, and moves the cut as the wireless signal changes. It does keep adapting, which is rare.</a:t>
             </a:r>
             <a:endParaRPr lang="en-US" sz="1000" dirty="0"/>
           </a:p>
@@ -14786,7 +14789,7 @@
                 <a:ea typeface="Calibri" pitchFamily="34" charset="-122"/>
                 <a:cs typeface="Calibri" pitchFamily="34" charset="-120"/>
               </a:rPr>
-              <a:t>Learned policy needs training and gives no optimality guarantee; single split point.</a:t>
+              <a:t>The policy must be trained first, and cannot promise the best answer. Only one cut point.</a:t>
             </a:r>
             <a:endParaRPr lang="en-US" sz="950" dirty="0"/>
           </a:p>
@@ -14979,7 +14982,7 @@
                 <a:ea typeface="Calibri" pitchFamily="34" charset="-122"/>
                 <a:cs typeface="Calibri" pitchFamily="34" charset="-120"/>
               </a:rPr>
-              <a:t>Survey of distributed inference across advances, challenges and directions; names dynamic adaptation under heterogeneity as an open problem.</a:t>
+              <a:t>Reviews the whole field, and lists 'adapting to machines that keep changing' as an open problem.</a:t>
             </a:r>
             <a:endParaRPr lang="en-US" sz="1000" dirty="0"/>
           </a:p>
@@ -15046,7 +15049,7 @@
                 <a:ea typeface="Calibri" pitchFamily="34" charset="-122"/>
                 <a:cs typeface="Calibri" pitchFamily="34" charset="-120"/>
               </a:rPr>
-              <a:t>Confirms the gap this work targets rather than filling it.</a:t>
+              <a:t>Confirms the gap we are filling. It does not fill it.</a:t>
             </a:r>
             <a:endParaRPr lang="en-US" sz="950" dirty="0"/>
           </a:p>
@@ -15239,7 +15242,7 @@
                 <a:ea typeface="Calibri" pitchFamily="34" charset="-122"/>
                 <a:cs typeface="Calibri" pitchFamily="34" charset="-120"/>
               </a:rPr>
-              <a:t>Custom Linux schedulers loaded at runtime as eBPF programs (sched_ext, Linux 6.12) - evidence that eBPF is becoming a control substrate, not only an observability one.</a:t>
+              <a:t>Loads custom Linux schedulers as eBPF programs while the system runs. Shows eBPF is now used to control things, not only to watch them.</a:t>
             </a:r>
             <a:endParaRPr lang="en-US" sz="1000" dirty="0"/>
           </a:p>
@@ -15306,7 +15309,7 @@
                 <a:ea typeface="Calibri" pitchFamily="34" charset="-122"/>
                 <a:cs typeface="Calibri" pitchFamily="34" charset="-120"/>
               </a:rPr>
-              <a:t>Schedules CPU tasks on one host; no notion of a distributed model pipeline.</a:t>
+              <a:t>Works on one machine's CPU tasks. Nothing about splitting a model across machines.</a:t>
             </a:r>
             <a:endParaRPr lang="en-US" sz="950" dirty="0"/>
           </a:p>
@@ -15345,7 +15348,7 @@
                 <a:ea typeface="Calibri" pitchFamily="34" charset="-122"/>
                 <a:cs typeface="Calibri" pitchFamily="34" charset="-120"/>
               </a:rPr>
-              <a:t>Limitation relevant to this work</a:t>
+              <a:t>What it does not do</a:t>
             </a:r>
             <a:endParaRPr lang="en-US" sz="900" dirty="0"/>
           </a:p>
@@ -15423,7 +15426,7 @@
                 <a:ea typeface="Calibri" pitchFamily="34" charset="-122"/>
                 <a:cs typeface="Calibri" pitchFamily="34" charset="-120"/>
               </a:rPr>
-              <a:t>All ten works published 2024-2025; full citations on slide 15.</a:t>
+              <a:t>All ten papers are from 2024-2025. Full list on slide 15.</a:t>
             </a:r>
             <a:endParaRPr lang="en-US" sz="950" dirty="0"/>
           </a:p>
@@ -15533,7 +15536,7 @@
                 <a:ea typeface="Calibri" pitchFamily="34" charset="-122"/>
                 <a:cs typeface="Calibri" pitchFamily="34" charset="-120"/>
               </a:rPr>
-              <a:t>SYNTHESIS</a:t>
+              <a:t>WHAT IS MISSING</a:t>
             </a:r>
             <a:endParaRPr lang="en-US" sz="1150" dirty="0"/>
           </a:p>
@@ -15572,7 +15575,7 @@
                 <a:ea typeface="Cambria" pitchFamily="34" charset="-122"/>
                 <a:cs typeface="Cambria" pitchFamily="34" charset="-120"/>
               </a:rPr>
-              <a:t>Where the literature stops</a:t>
+              <a:t>What past work is missing</a:t>
             </a:r>
             <a:endParaRPr lang="en-US" sz="3200" dirty="0"/>
           </a:p>
@@ -15683,7 +15686,7 @@
                 <a:ea typeface="Calibri" pitchFamily="34" charset="-122"/>
                 <a:cs typeface="Calibri" pitchFamily="34" charset="-120"/>
               </a:rPr>
-              <a:t>Datacenter serving</a:t>
+              <a:t>Data centre serving</a:t>
             </a:r>
             <a:endParaRPr lang="en-US" sz="950" dirty="0"/>
           </a:p>
@@ -15745,7 +15748,7 @@
                 <a:ea typeface="Calibri" pitchFamily="34" charset="-122"/>
                 <a:cs typeface="Calibri" pitchFamily="34" charset="-120"/>
               </a:rPr>
-              <a:t>Edge partitioning</a:t>
+              <a:t>Splitting on small devices</a:t>
             </a:r>
             <a:endParaRPr lang="en-US" sz="950" dirty="0"/>
           </a:p>
@@ -15807,7 +15810,7 @@
                 <a:ea typeface="Calibri" pitchFamily="34" charset="-122"/>
                 <a:cs typeface="Calibri" pitchFamily="34" charset="-120"/>
               </a:rPr>
-              <a:t>Adaptive splitting</a:t>
+              <a:t>Learned splitting</a:t>
             </a:r>
             <a:endParaRPr lang="en-US" sz="950" dirty="0"/>
           </a:p>
@@ -15936,7 +15939,7 @@
                 <a:ea typeface="Calibri" pitchFamily="34" charset="-122"/>
                 <a:cs typeface="Calibri" pitchFamily="34" charset="-120"/>
               </a:rPr>
-              <a:t>Heterogeneity-aware placement</a:t>
+              <a:t>Handles machines of different speed</a:t>
             </a:r>
             <a:endParaRPr lang="en-US" sz="1000" dirty="0"/>
           </a:p>
@@ -16146,7 +16149,7 @@
                 <a:ea typeface="Calibri" pitchFamily="34" charset="-122"/>
                 <a:cs typeface="Calibri" pitchFamily="34" charset="-120"/>
               </a:rPr>
-              <a:t>Exact optimum for a snapshot</a:t>
+              <a:t>Finds the best cut for the moment</a:t>
             </a:r>
             <a:endParaRPr lang="en-US" sz="1000" dirty="0"/>
           </a:p>
@@ -16188,7 +16191,7 @@
                 <a:ea typeface="Calibri" pitchFamily="34" charset="-122"/>
                 <a:cs typeface="Calibri" pitchFamily="34" charset="-120"/>
               </a:rPr>
-              <a:t>MILP</a:t>
+              <a:t>yes, heavy solver</a:t>
             </a:r>
             <a:endParaRPr lang="en-US" sz="1000" dirty="0"/>
           </a:p>
@@ -16230,7 +16233,7 @@
                 <a:ea typeface="Calibri" pitchFamily="34" charset="-122"/>
                 <a:cs typeface="Calibri" pitchFamily="34" charset="-120"/>
               </a:rPr>
-              <a:t>DP</a:t>
+              <a:t>yes</a:t>
             </a:r>
             <a:endParaRPr lang="en-US" sz="1000" dirty="0"/>
           </a:p>
@@ -16272,7 +16275,7 @@
                 <a:ea typeface="Calibri" pitchFamily="34" charset="-122"/>
                 <a:cs typeface="Calibri" pitchFamily="34" charset="-120"/>
               </a:rPr>
-              <a:t>no (learned / heuristic)</a:t>
+              <a:t>no (learned or rule of thumb)</a:t>
             </a:r>
             <a:endParaRPr lang="en-US" sz="1000" dirty="0"/>
           </a:p>
@@ -16314,7 +16317,7 @@
                 <a:ea typeface="Calibri" pitchFamily="34" charset="-122"/>
                 <a:cs typeface="Calibri" pitchFamily="34" charset="-120"/>
               </a:rPr>
-              <a:t>DP, unit-tested vs brute force</a:t>
+              <a:t>yes, checked against brute force</a:t>
             </a:r>
             <a:endParaRPr lang="en-US" sz="1000" dirty="0"/>
           </a:p>
@@ -16381,7 +16384,7 @@
                 <a:ea typeface="Calibri" pitchFamily="34" charset="-122"/>
                 <a:cs typeface="Calibri" pitchFamily="34" charset="-120"/>
               </a:rPr>
-              <a:t>Re-plans while serving</a:t>
+              <a:t>Changes the cut while running</a:t>
             </a:r>
             <a:endParaRPr lang="en-US" sz="1000" dirty="0"/>
           </a:p>
@@ -16423,7 +16426,7 @@
                 <a:ea typeface="Calibri" pitchFamily="34" charset="-122"/>
                 <a:cs typeface="Calibri" pitchFamily="34" charset="-120"/>
               </a:rPr>
-              <a:t>request routing only</a:t>
+              <a:t>only where requests go</a:t>
             </a:r>
             <a:endParaRPr lang="en-US" sz="1000" dirty="0"/>
           </a:p>
@@ -16549,7 +16552,7 @@
                 <a:ea typeface="Calibri" pitchFamily="34" charset="-122"/>
                 <a:cs typeface="Calibri" pitchFamily="34" charset="-120"/>
               </a:rPr>
-              <a:t>yes, every 2 s</a:t>
+              <a:t>yes, every 2 seconds</a:t>
             </a:r>
             <a:endParaRPr lang="en-US" sz="1000" dirty="0"/>
           </a:p>
@@ -16591,7 +16594,7 @@
                 <a:ea typeface="Calibri" pitchFamily="34" charset="-122"/>
                 <a:cs typeface="Calibri" pitchFamily="34" charset="-120"/>
               </a:rPr>
-              <a:t>Kernel-measured network input</a:t>
+              <a:t>Measures the network in the kernel</a:t>
             </a:r>
             <a:endParaRPr lang="en-US" sz="1000" dirty="0"/>
           </a:p>
@@ -16675,7 +16678,7 @@
                 <a:ea typeface="Calibri" pitchFamily="34" charset="-122"/>
                 <a:cs typeface="Calibri" pitchFamily="34" charset="-120"/>
               </a:rPr>
-              <a:t>user-space probes</a:t>
+              <a:t>app-level timers</a:t>
             </a:r>
             <a:endParaRPr lang="en-US" sz="1000" dirty="0"/>
           </a:p>
@@ -16717,7 +16720,7 @@
                 <a:ea typeface="Calibri" pitchFamily="34" charset="-122"/>
                 <a:cs typeface="Calibri" pitchFamily="34" charset="-120"/>
               </a:rPr>
-              <a:t>channel estimate</a:t>
+              <a:t>signal estimate</a:t>
             </a:r>
             <a:endParaRPr lang="en-US" sz="1000" dirty="0"/>
           </a:p>
@@ -16759,7 +16762,7 @@
                 <a:ea typeface="Calibri" pitchFamily="34" charset="-122"/>
                 <a:cs typeface="Calibri" pitchFamily="34" charset="-120"/>
               </a:rPr>
-              <a:t>eBPF tp_btf/tcp_probe sRTT</a:t>
+              <a:t>yes, reads TCP directly</a:t>
             </a:r>
             <a:endParaRPr lang="en-US" sz="1000" dirty="0"/>
           </a:p>
@@ -16826,7 +16829,7 @@
                 <a:ea typeface="Calibri" pitchFamily="34" charset="-122"/>
                 <a:cs typeface="Calibri" pitchFamily="34" charset="-120"/>
               </a:rPr>
-              <a:t>Thermal / throttle input</a:t>
+              <a:t>Knows when a machine gets hot</a:t>
             </a:r>
             <a:endParaRPr lang="en-US" sz="1000" dirty="0"/>
           </a:p>
@@ -16994,7 +16997,7 @@
                 <a:ea typeface="Calibri" pitchFamily="34" charset="-122"/>
                 <a:cs typeface="Calibri" pitchFamily="34" charset="-120"/>
               </a:rPr>
-              <a:t>NVML or /sys/class/thermal</a:t>
+              <a:t>yes, reads GPU and CPU heat</a:t>
             </a:r>
             <a:endParaRPr lang="en-US" sz="1000" dirty="0"/>
           </a:p>
@@ -17036,7 +17039,7 @@
                 <a:ea typeface="Calibri" pitchFamily="34" charset="-122"/>
                 <a:cs typeface="Calibri" pitchFamily="34" charset="-120"/>
               </a:rPr>
-              <a:t>Survives node loss</a:t>
+              <a:t>Survives a machine dying</a:t>
             </a:r>
             <a:endParaRPr lang="en-US" sz="1000" dirty="0"/>
           </a:p>
@@ -17078,7 +17081,7 @@
                 <a:ea typeface="Calibri" pitchFamily="34" charset="-122"/>
                 <a:cs typeface="Calibri" pitchFamily="34" charset="-120"/>
               </a:rPr>
-              <a:t>replication</a:t>
+              <a:t>by keeping copies</a:t>
             </a:r>
             <a:endParaRPr lang="en-US" sz="1000" dirty="0"/>
           </a:p>
@@ -17204,7 +17207,7 @@
                 <a:ea typeface="Calibri" pitchFamily="34" charset="-122"/>
                 <a:cs typeface="Calibri" pitchFamily="34" charset="-120"/>
               </a:rPr>
-              <a:t>heartbeat-forced repartition</a:t>
+              <a:t>yes, re-cuts in 3 seconds</a:t>
             </a:r>
             <a:endParaRPr lang="en-US" sz="1000" dirty="0"/>
           </a:p>
@@ -17271,7 +17274,7 @@
                 <a:ea typeface="Calibri" pitchFamily="34" charset="-122"/>
                 <a:cs typeface="Calibri" pitchFamily="34" charset="-120"/>
               </a:rPr>
-              <a:t>Applies without restart</a:t>
+              <a:t>Changes without restarting</a:t>
             </a:r>
             <a:endParaRPr lang="en-US" sz="1000" dirty="0"/>
           </a:p>
@@ -17313,7 +17316,7 @@
                 <a:ea typeface="Calibri" pitchFamily="34" charset="-122"/>
                 <a:cs typeface="Calibri" pitchFamily="34" charset="-120"/>
               </a:rPr>
-              <a:t>n/a</a:t>
+              <a:t>not applicable</a:t>
             </a:r>
             <a:endParaRPr lang="en-US" sz="1000" dirty="0"/>
           </a:p>
@@ -17439,7 +17442,7 @@
                 <a:ea typeface="Calibri" pitchFamily="34" charset="-122"/>
                 <a:cs typeface="Calibri" pitchFamily="34" charset="-120"/>
               </a:rPr>
-              <a:t>gRPC hot reassign, generation-fenced</a:t>
+              <a:t>yes, moves layers live</a:t>
             </a:r>
             <a:endParaRPr lang="en-US" sz="1000" dirty="0"/>
           </a:p>
@@ -17507,7 +17510,7 @@
                 <a:ea typeface="Calibri" pitchFamily="34" charset="-122"/>
                 <a:cs typeface="Calibri" pitchFamily="34" charset="-120"/>
               </a:rPr>
-              <a:t>No prior system closes the loop from kernel-level measurement back to the layer split while inference is running.</a:t>
+              <a:t>No earlier system measures the machines in the kernel and feeds that straight back into the cut, while the model is still answering.</a:t>
             </a:r>
             <a:endParaRPr lang="en-US" sz="950" dirty="0"/>
           </a:p>
@@ -17642,7 +17645,7 @@
                 <a:ea typeface="Calibri" pitchFamily="34" charset="-122"/>
                 <a:cs typeface="Calibri" pitchFamily="34" charset="-120"/>
               </a:rPr>
-              <a:t>PROBLEM STATEMENT</a:t>
+              <a:t>THE PROBLEM</a:t>
             </a:r>
             <a:endParaRPr lang="en-US" sz="1150" dirty="0"/>
           </a:p>
@@ -17684,7 +17687,7 @@
                 <a:ea typeface="Cambria" pitchFamily="34" charset="-122"/>
                 <a:cs typeface="Cambria" pitchFamily="34" charset="-120"/>
               </a:rPr>
-              <a:t>Given N transformer layers and K heterogeneous edge nodes whose compute speed, link latency and liveness all vary during inference, continuously maintain a contiguous layer assignment that minimises the bottleneck stage - without restarting the pipeline.</a:t>
+              <a:t>We have N model layers and K machines of different speeds. While the model is answering, their speed, their network delay, and whether they are even alive all keep changing. Keep choosing a cut that makes the slowest machine as fast as possible - and never restart anything to do it.</a:t>
             </a:r>
             <a:endParaRPr lang="en-US" sz="2100" dirty="0"/>
           </a:p>
@@ -17829,7 +17832,7 @@
                 <a:ea typeface="Calibri" pitchFamily="34" charset="-122"/>
                 <a:cs typeface="Calibri" pitchFamily="34" charset="-120"/>
               </a:rPr>
-              <a:t>Obtain per-flow latency and per-node thermal state cheaply and without instrumenting the inference code.</a:t>
+              <a:t>Measure network delay and machine heat cheaply, without changing the model code.</a:t>
             </a:r>
             <a:endParaRPr lang="en-US" sz="1050" dirty="0"/>
           </a:p>
@@ -17974,7 +17977,7 @@
                 <a:ea typeface="Calibri" pitchFamily="34" charset="-122"/>
                 <a:cs typeface="Calibri" pitchFamily="34" charset="-120"/>
               </a:rPr>
-              <a:t>Solve the placement exactly at telemetry rate, and suppress oscillation when the measurement is merely noisy.</a:t>
+              <a:t>Work out the best cut fast enough to redo it often, without flip-flopping when a reading is just noisy.</a:t>
             </a:r>
             <a:endParaRPr lang="en-US" sz="1050" dirty="0"/>
           </a:p>
@@ -18119,7 +18122,7 @@
                 <a:ea typeface="Calibri" pitchFamily="34" charset="-122"/>
                 <a:cs typeface="Calibri" pitchFamily="34" charset="-120"/>
               </a:rPr>
-              <a:t>Move layer ranges between live workers without dropping in-flight requests or restarting pods.</a:t>
+              <a:t>Move layers between running machines without losing requests or restarting anything.</a:t>
             </a:r>
             <a:endParaRPr lang="en-US" sz="1050" dirty="0"/>
           </a:p>
@@ -18264,7 +18267,7 @@
                 <a:ea typeface="Calibri" pitchFamily="34" charset="-122"/>
                 <a:cs typeface="Calibri" pitchFamily="34" charset="-120"/>
               </a:rPr>
-              <a:t>Detect node loss and redistribute its layers across the survivors automatically.</a:t>
+              <a:t>Notice when a machine dies and share its layers among the machines that are left.</a:t>
             </a:r>
             <a:endParaRPr lang="en-US" sz="1050" dirty="0"/>
           </a:p>
@@ -18330,7 +18333,7 @@
                 <a:ea typeface="Calibri" pitchFamily="34" charset="-122"/>
                 <a:cs typeface="Calibri" pitchFamily="34" charset="-120"/>
               </a:rPr>
-              <a:t>Constraint</a:t>
+              <a:t>The rules we set ourselves</a:t>
             </a:r>
             <a:endParaRPr lang="en-US" sz="1050" dirty="0"/>
           </a:p>
@@ -18372,7 +18375,7 @@
                 <a:ea typeface="Calibri" pitchFamily="34" charset="-122"/>
                 <a:cs typeface="Calibri" pitchFamily="34" charset="-120"/>
               </a:rPr>
-              <a:t>Commodity Linux only.</a:t>
+              <a:t>Ordinary Linux only.</a:t>
             </a:r>
             <a:endParaRPr lang="en-US" sz="1100" dirty="0"/>
           </a:p>
@@ -18401,7 +18404,7 @@
                 <a:ea typeface="Calibri" pitchFamily="34" charset="-122"/>
                 <a:cs typeface="Calibri" pitchFamily="34" charset="-120"/>
               </a:rPr>
-              <a:t>No datacenter interconnect, no vendor telemetry agent, no change to the model code, and no assumption that a node stays alive.</a:t>
+              <a:t>No special data centre network, no vendor software, no changes to the model code, and no assuming a machine stays alive.</a:t>
             </a:r>
             <a:endParaRPr lang="en-US" sz="1100" dirty="0"/>
           </a:p>
@@ -18511,7 +18514,7 @@
                 <a:ea typeface="Calibri" pitchFamily="34" charset="-122"/>
                 <a:cs typeface="Calibri" pitchFamily="34" charset="-120"/>
               </a:rPr>
-              <a:t>CONTRIBUTIONS</a:t>
+              <a:t>WHAT IS NEW</a:t>
             </a:r>
             <a:endParaRPr lang="en-US" sz="1150" dirty="0"/>
           </a:p>
@@ -18550,7 +18553,7 @@
                 <a:ea typeface="Cambria" pitchFamily="34" charset="-122"/>
                 <a:cs typeface="Cambria" pitchFamily="34" charset="-120"/>
               </a:rPr>
-              <a:t>What is new here</a:t>
+              <a:t>What is new in our work</a:t>
             </a:r>
             <a:endParaRPr lang="en-US" sz="3200" dirty="0"/>
           </a:p>
@@ -18687,7 +18690,7 @@
                 <a:ea typeface="Calibri" pitchFamily="34" charset="-122"/>
                 <a:cs typeface="Calibri" pitchFamily="34" charset="-120"/>
               </a:rPr>
-              <a:t>Kernel telemetry as a scheduling input</a:t>
+              <a:t>We measure the network inside the kernel</a:t>
             </a:r>
             <a:endParaRPr lang="en-US" sz="1250" dirty="0"/>
           </a:p>
@@ -18729,7 +18732,7 @@
                 <a:ea typeface="Calibri" pitchFamily="34" charset="-122"/>
                 <a:cs typeface="Calibri" pitchFamily="34" charset="-120"/>
               </a:rPr>
-              <a:t>CO-RE eBPF programs (tp_btf/tcp_probe, fentry/tcp_sendmsg) feed per-flow smoothed RTT straight into a model-placement decision. Prior edge-LLM systems use user-space probes or offline profiles; none drives the partitioner from the kernel's own TCP state.</a:t>
+              <a:t>Small eBPF programs read the round-trip time Linux already tracks for every connection, and we feed that straight into the cut decision. Other systems guess with app-level timers, or use readings taken before the run.</a:t>
             </a:r>
             <a:endParaRPr lang="en-US" sz="950" dirty="0"/>
           </a:p>
@@ -18866,7 +18869,7 @@
                 <a:ea typeface="Calibri" pitchFamily="34" charset="-122"/>
                 <a:cs typeface="Calibri" pitchFamily="34" charset="-120"/>
               </a:rPr>
-              <a:t>A closed loop, not a one-shot plan</a:t>
+              <a:t>We never stop deciding</a:t>
             </a:r>
             <a:endParaRPr lang="en-US" sz="1250" dirty="0"/>
           </a:p>
@@ -18908,7 +18911,7 @@
                 <a:ea typeface="Calibri" pitchFamily="34" charset="-122"/>
                 <a:cs typeface="Calibri" pitchFamily="34" charset="-120"/>
               </a:rPr>
-              <a:t>WATCH-DECIDE-ACT-HEAL runs every 2 s for the lifetime of the deployment. The split is a continuously maintained control variable rather than a deployment-time constant.</a:t>
+              <a:t>Watch, decide, act, heal - every 2 seconds, for as long as the system runs. The cut is something we keep adjusting, not a setting we pick once.</a:t>
             </a:r>
             <a:endParaRPr lang="en-US" sz="950" dirty="0"/>
           </a:p>
@@ -19045,7 +19048,7 @@
                 <a:ea typeface="Calibri" pitchFamily="34" charset="-122"/>
                 <a:cs typeface="Calibri" pitchFamily="34" charset="-120"/>
               </a:rPr>
-              <a:t>Hysteresis-gated exact optimisation</a:t>
+              <a:t>We add brakes so it does not flip-flop</a:t>
             </a:r>
             <a:endParaRPr lang="en-US" sz="1250" dirty="0"/>
           </a:p>
@@ -19087,7 +19090,7 @@
                 <a:ea typeface="Calibri" pitchFamily="34" charset="-122"/>
                 <a:cs typeface="Calibri" pitchFamily="34" charset="-120"/>
               </a:rPr>
-              <a:t>The O(N^2 K) DP is exact for each snapshot; a 15% improvement threshold plus a 30 s cooldown converts it into a stable controller. One gate handles thermal, network and failure triggers alike.</a:t>
+              <a:t>The solver gives the exact best cut every time. We only apply a new one if it is at least 15% better and 30 seconds have passed. The same brake handles heat, network and machine failure.</a:t>
             </a:r>
             <a:endParaRPr lang="en-US" sz="950" dirty="0"/>
           </a:p>
@@ -19224,7 +19227,7 @@
                 <a:ea typeface="Calibri" pitchFamily="34" charset="-122"/>
                 <a:cs typeface="Calibri" pitchFamily="34" charset="-120"/>
               </a:rPr>
-              <a:t>Restart-free, generation-fenced reassignment</a:t>
+              <a:t>We move layers without a restart</a:t>
             </a:r>
             <a:endParaRPr lang="en-US" sz="1250" dirty="0"/>
           </a:p>
@@ -19266,7 +19269,7 @@
                 <a:ea typeface="Calibri" pitchFamily="34" charset="-122"/>
                 <a:cs typeface="Calibri" pitchFamily="34" charset="-120"/>
               </a:rPr>
-              <a:t>Layer ranges move over gRPC while requests are in flight. Every assignment carries a generation; workers reject stale forwards and the stateless design makes context replay trivially correct.</a:t>
+              <a:t>Layers move between machines while requests are still in flight. Each plan carries a version number, machines refuse messages from an old plan, and because machines keep no state we can simply replay the request.</a:t>
             </a:r>
             <a:endParaRPr lang="en-US" sz="950" dirty="0"/>
           </a:p>
@@ -19403,7 +19406,7 @@
                 <a:ea typeface="Calibri" pitchFamily="34" charset="-122"/>
                 <a:cs typeface="Calibri" pitchFamily="34" charset="-120"/>
               </a:rPr>
-              <a:t>An ablation that isolates continuous telemetry</a:t>
+              <a:t>We show the gain comes from live measuring</a:t>
             </a:r>
             <a:endParaRPr lang="en-US" sz="1250" dirty="0"/>
           </a:p>
@@ -19445,7 +19448,7 @@
                 <a:ea typeface="Calibri" pitchFamily="34" charset="-122"/>
                 <a:cs typeface="Calibri" pitchFamily="34" charset="-120"/>
               </a:rPr>
-              <a:t>A profile-once mode reuses the same DP and apply path but freezes its inputs, approximating offline-profiling systems - so the measured gain is attributable to live telemetry, not to a better solver.</a:t>
+              <a:t>We built a 'measure once' mode that uses the same solver and the same code, but freezes what it measured. So the improvement we report comes from measuring all the time, not from a better solver.</a:t>
             </a:r>
             <a:endParaRPr lang="en-US" sz="950" dirty="0"/>
           </a:p>
@@ -19518,7 +19521,7 @@
                 <a:ea typeface="Calibri" pitchFamily="34" charset="-122"/>
                 <a:cs typeface="Calibri" pitchFamily="34" charset="-120"/>
               </a:rPr>
-              <a:t>Core novelty claim</a:t>
+              <a:t>The main new idea</a:t>
             </a:r>
             <a:endParaRPr lang="en-US" sz="1050" dirty="0"/>
           </a:p>
@@ -19560,7 +19563,7 @@
                 <a:ea typeface="Calibri" pitchFamily="34" charset="-122"/>
                 <a:cs typeface="Calibri" pitchFamily="34" charset="-120"/>
               </a:rPr>
-              <a:t>Not a better partitioning algorithm - the same classical DP the literature already uses, placed inside a kernel-measured feedback loop that never stops running.</a:t>
+              <a:t>We did not invent a new splitting algorithm. We took the standard one and put it inside a loop that keeps measuring the real machines and never stops.</a:t>
             </a:r>
             <a:endParaRPr lang="en-US" sz="1150" dirty="0"/>
           </a:p>
@@ -19599,7 +19602,7 @@
                 <a:ea typeface="Calibri" pitchFamily="34" charset="-122"/>
                 <a:cs typeface="Calibri" pitchFamily="34" charset="-120"/>
               </a:rPr>
-              <a:t>Amber-numbered items are the primary novelty claims.</a:t>
+              <a:t>The orange-numbered items are the main new ideas.</a:t>
             </a:r>
             <a:endParaRPr lang="en-US" sz="950" dirty="0"/>
           </a:p>
@@ -19709,7 +19712,7 @@
                 <a:ea typeface="Calibri" pitchFamily="34" charset="-122"/>
                 <a:cs typeface="Calibri" pitchFamily="34" charset="-120"/>
               </a:rPr>
-              <a:t>PROPOSED WORK</a:t>
+              <a:t>OUR SYSTEM</a:t>
             </a:r>
             <a:endParaRPr lang="en-US" sz="1150" dirty="0"/>
           </a:p>
@@ -19748,7 +19751,7 @@
                 <a:ea typeface="Cambria" pitchFamily="34" charset="-122"/>
                 <a:cs typeface="Cambria" pitchFamily="34" charset="-120"/>
               </a:rPr>
-              <a:t>The closed loop</a:t>
+              <a:t>How the loop works</a:t>
             </a:r>
             <a:endParaRPr lang="en-US" sz="3200" dirty="0"/>
           </a:p>
@@ -19951,7 +19954,7 @@
                 <a:ea typeface="Calibri" pitchFamily="34" charset="-122"/>
                 <a:cs typeface="Calibri" pitchFamily="34" charset="-120"/>
               </a:rPr>
-              <a:t>eBPF + NVML</a:t>
+              <a:t>measure</a:t>
             </a:r>
             <a:endParaRPr lang="en-US" sz="900" dirty="0"/>
           </a:p>
@@ -19993,7 +19996,7 @@
                 <a:ea typeface="Calibri" pitchFamily="34" charset="-122"/>
                 <a:cs typeface="Calibri" pitchFamily="34" charset="-120"/>
               </a:rPr>
-              <a:t>tp_btf/tcp_probe gives per-flow sRTT and fentry/tcp_sendmsg gives throughput. GPU temperature and derated speed come from NVML or /sys/class/thermal.</a:t>
+              <a:t>Two small kernel programs report the delay and speed of every connection. Another reads GPU or CPU temperature and how much the machine has slowed down.</a:t>
             </a:r>
             <a:endParaRPr lang="en-US" sz="950" dirty="0"/>
           </a:p>
@@ -20260,7 +20263,7 @@
                 <a:ea typeface="Calibri" pitchFamily="34" charset="-122"/>
                 <a:cs typeface="Calibri" pitchFamily="34" charset="-120"/>
               </a:rPr>
-              <a:t>linear partition DP</a:t>
+              <a:t>choose</a:t>
             </a:r>
             <a:endParaRPr lang="en-US" sz="900" dirty="0"/>
           </a:p>
@@ -20302,7 +20305,7 @@
                 <a:ea typeface="Calibri" pitchFamily="34" charset="-122"/>
                 <a:cs typeface="Calibri" pitchFamily="34" charset="-120"/>
               </a:rPr>
-              <a:t>Exact O(N^2 K) minimisation of the bottleneck stage cost, gated by a 15% improvement threshold and a 30 s cooldown.</a:t>
+              <a:t>Works out the cut that makes the slowest machine as fast as possible. Applied only if it is 15% better and 30 seconds have passed.</a:t>
             </a:r>
             <a:endParaRPr lang="en-US" sz="950" dirty="0"/>
           </a:p>
@@ -20569,7 +20572,7 @@
                 <a:ea typeface="Calibri" pitchFamily="34" charset="-122"/>
                 <a:cs typeface="Calibri" pitchFamily="34" charset="-120"/>
               </a:rPr>
-              <a:t>K8s controller</a:t>
+              <a:t>apply</a:t>
             </a:r>
             <a:endParaRPr lang="en-US" sz="900" dirty="0"/>
           </a:p>
@@ -20611,7 +20614,7 @@
                 <a:ea typeface="Calibri" pitchFamily="34" charset="-122"/>
                 <a:cs typeface="Calibri" pitchFamily="34" charset="-120"/>
               </a:rPr>
-              <a:t>Hot-reassigns layer ranges over gRPC with no pod restart, recording state in the InferencePipeline CRD with a monotonic generation.</a:t>
+              <a:t>Sends the new layer ranges to the machines with no restart, and saves the plan in Kubernetes with a version number.</a:t>
             </a:r>
             <a:endParaRPr lang="en-US" sz="950" dirty="0"/>
           </a:p>
@@ -20878,7 +20881,7 @@
                 <a:ea typeface="Calibri" pitchFamily="34" charset="-122"/>
                 <a:cs typeface="Calibri" pitchFamily="34" charset="-120"/>
               </a:rPr>
-              <a:t>heartbeat watchdog</a:t>
+              <a:t>recover</a:t>
             </a:r>
             <a:endParaRPr lang="en-US" sz="900" dirty="0"/>
           </a:p>
@@ -20920,7 +20923,7 @@
                 <a:ea typeface="Calibri" pitchFamily="34" charset="-122"/>
                 <a:cs typeface="Calibri" pitchFamily="34" charset="-120"/>
               </a:rPr>
-              <a:t>A 3 s stale heartbeat marks a node gone and forces an immediate repartition across the surviving workers, bypassing hysteresis.</a:t>
+              <a:t>If a machine stops reporting for 3 seconds, treat it as dead and re-cut across the machines left, ignoring the brakes.</a:t>
             </a:r>
             <a:endParaRPr lang="en-US" sz="950" dirty="0"/>
           </a:p>
@@ -21022,7 +21025,7 @@
                 <a:ea typeface="Calibri" pitchFamily="34" charset="-122"/>
                 <a:cs typeface="Calibri" pitchFamily="34" charset="-120"/>
               </a:rPr>
-              <a:t>loop repeats every 2 s</a:t>
+              <a:t>the loop repeats every 2 seconds</a:t>
             </a:r>
             <a:endParaRPr lang="en-US" sz="1050" dirty="0"/>
           </a:p>
@@ -21091,7 +21094,7 @@
                 <a:ea typeface="Calibri" pitchFamily="34" charset="-122"/>
                 <a:cs typeface="Calibri" pitchFamily="34" charset="-120"/>
               </a:rPr>
-              <a:t>Consistency: every assignment carries a generation. Workers reject stale-generation forwards; the router refetches the layout and replays the accumulated context. Workers are stateless, so replay is trivially correct.</a:t>
+              <a:t>Staying correct: every plan carries a version number. Machines refuse messages from an old plan. The router then fetches the new plan and replays the request from the start. Machines keep no state, so replaying is always safe.</a:t>
             </a:r>
             <a:endParaRPr lang="en-US" sz="1050" dirty="0"/>
           </a:p>
@@ -21201,7 +21204,7 @@
                 <a:ea typeface="Calibri" pitchFamily="34" charset="-122"/>
                 <a:cs typeface="Calibri" pitchFamily="34" charset="-120"/>
               </a:rPr>
-              <a:t>PROPOSED WORK</a:t>
+              <a:t>OUR SYSTEM</a:t>
             </a:r>
             <a:endParaRPr lang="en-US" sz="1150" dirty="0"/>
           </a:p>
@@ -21240,7 +21243,7 @@
                 <a:ea typeface="Cambria" pitchFamily="34" charset="-122"/>
                 <a:cs typeface="Cambria" pitchFamily="34" charset="-120"/>
               </a:rPr>
-              <a:t>Formulation and stability</a:t>
+              <a:t>The maths, and how we keep it steady</a:t>
             </a:r>
             <a:endParaRPr lang="en-US" sz="3200" dirty="0"/>
           </a:p>
@@ -21313,7 +21316,7 @@
                 <a:ea typeface="Calibri" pitchFamily="34" charset="-122"/>
                 <a:cs typeface="Calibri" pitchFamily="34" charset="-120"/>
               </a:rPr>
-              <a:t>Objective</a:t>
+              <a:t>The goal</a:t>
             </a:r>
             <a:endParaRPr lang="en-US" sz="1250" dirty="0"/>
           </a:p>
@@ -21355,7 +21358,7 @@
                 <a:ea typeface="Courier New" pitchFamily="34" charset="-122"/>
                 <a:cs typeface="Courier New" pitchFamily="34" charset="-120"/>
               </a:rPr>
-              <a:t>minimise  max   cost(i)</a:t>
+              <a:t>make the slowest machine</a:t>
             </a:r>
             <a:endParaRPr lang="en-US" sz="1300" dirty="0"/>
           </a:p>
@@ -21375,7 +21378,7 @@
                 <a:ea typeface="Courier New" pitchFamily="34" charset="-122"/>
                 <a:cs typeface="Courier New" pitchFamily="34" charset="-120"/>
               </a:rPr>
-              <a:t>           i in 1..K</a:t>
+              <a:t>as fast as possible</a:t>
             </a:r>
             <a:endParaRPr lang="en-US" sz="1300" dirty="0"/>
           </a:p>
@@ -21406,7 +21409,7 @@
               <a:buNone/>
             </a:pPr>
             <a:r>
-              <a:rPr lang="en-US" sz="1000" dirty="0">
+              <a:rPr lang="en-US" sz="900" dirty="0">
                 <a:solidFill>
                   <a:srgbClr val="3E4658"/>
                 </a:solidFill>
@@ -21414,9 +21417,9 @@
                 <a:ea typeface="Courier New" pitchFamily="34" charset="-122"/>
                 <a:cs typeface="Courier New" pitchFamily="34" charset="-120"/>
               </a:rPr>
-              <a:t>cost(i) = layers(i) x perLayerMs / speed(i)  +  linkMs(i-1)</a:t>
-            </a:r>
-            <a:endParaRPr lang="en-US" sz="1000" dirty="0"/>
+              <a:t>machine time  =  layers x time per layer / speed  +  delay</a:t>
+            </a:r>
+            <a:endParaRPr lang="en-US" sz="900" dirty="0"/>
           </a:p>
         </p:txBody>
       </p:sp>
@@ -21456,7 +21459,7 @@
                 <a:ea typeface="Calibri" pitchFamily="34" charset="-122"/>
                 <a:cs typeface="Calibri" pitchFamily="34" charset="-120"/>
               </a:rPr>
-              <a:t>subject to contiguous, non-overlapping ranges covering all N layers. An empty stage costs nothing - so the DP may bypass a worker entirely when its link has degraded past the value of its compute.</a:t>
+              <a:t>Each machine gets a block of layers next to each other, and together they cover all N layers. A machine given zero layers costs nothing at all - so the solver can skip a machine whose network has become too slow to be worth using.</a:t>
             </a:r>
             <a:endParaRPr lang="en-US" sz="1050" dirty="0"/>
           </a:p>
@@ -21529,7 +21532,7 @@
                 <a:ea typeface="Calibri" pitchFamily="34" charset="-122"/>
                 <a:cs typeface="Calibri" pitchFamily="34" charset="-120"/>
               </a:rPr>
-              <a:t>Solution</a:t>
+              <a:t>How we solve it</a:t>
             </a:r>
             <a:endParaRPr lang="en-US" sz="1250" dirty="0"/>
           </a:p>
@@ -21560,7 +21563,7 @@
               <a:buNone/>
             </a:pPr>
             <a:r>
-              <a:rPr lang="en-US" sz="950" dirty="0">
+              <a:rPr lang="en-US" sz="900" dirty="0">
                 <a:solidFill>
                   <a:srgbClr val="141821"/>
                 </a:solidFill>
@@ -21568,9 +21571,9 @@
                 <a:ea typeface="Courier New" pitchFamily="34" charset="-122"/>
                 <a:cs typeface="Courier New" pitchFamily="34" charset="-120"/>
               </a:rPr>
-              <a:t>f[j][w] = min over split of  max( f[split][w-1], cost(w, j - split) )</a:t>
-            </a:r>
-            <a:endParaRPr lang="en-US" sz="950" dirty="0"/>
+              <a:t>best[j][w]  =  best possible for the first j layers on w machines</a:t>
+            </a:r>
+            <a:endParaRPr lang="en-US" sz="900" dirty="0"/>
           </a:p>
         </p:txBody>
       </p:sp>
@@ -21610,7 +21613,7 @@
                 <a:ea typeface="Calibri" pitchFamily="34" charset="-122"/>
                 <a:cs typeface="Calibri" pitchFamily="34" charset="-120"/>
               </a:rPr>
-              <a:t>The classical linear-partition recurrence: minimal bottleneck for the first j layers over the first w workers. O(N^2 K) - about 1.7k operations for N=12, K=3, so re-solving at 0.5 Hz is free. Verified against brute force on 200 randomised instances.</a:t>
+              <a:t>This is a classic problem with a known exact answer. For 12 layers and 3 machines it takes about 1,700 steps, so redoing it every 2 seconds costs nothing. We checked it against brute force on 200 random cases.</a:t>
             </a:r>
             <a:endParaRPr lang="en-US" sz="1050" dirty="0"/>
           </a:p>
@@ -21683,7 +21686,7 @@
                 <a:ea typeface="Calibri" pitchFamily="34" charset="-122"/>
                 <a:cs typeface="Calibri" pitchFamily="34" charset="-120"/>
               </a:rPr>
-              <a:t>Why a bare optimiser is not a controller</a:t>
+              <a:t>Why a solver alone is not enough</a:t>
             </a:r>
             <a:endParaRPr lang="en-US" sz="1250" dirty="0"/>
           </a:p>
@@ -21725,7 +21728,7 @@
                 <a:ea typeface="Calibri" pitchFamily="34" charset="-122"/>
                 <a:cs typeface="Calibri" pitchFamily="34" charset="-120"/>
               </a:rPr>
-              <a:t>Telemetry is noisy. Re-applying the argmin on every 2 s tick would thrash the pipeline for sub-millisecond gains. Three rules turn the optimiser into a stable controller:</a:t>
+              <a:t>Measurements jump around. If we applied the best answer every 2 seconds, the system would keep moving layers for tiny gains. Three rules fix that:</a:t>
             </a:r>
             <a:endParaRPr lang="en-US" sz="1050" dirty="0"/>
           </a:p>
@@ -21789,7 +21792,7 @@
                 <a:ea typeface="Calibri" pitchFamily="34" charset="-122"/>
                 <a:cs typeface="Calibri" pitchFamily="34" charset="-120"/>
               </a:rPr>
-              <a:t>Improvement threshold</a:t>
+              <a:t>Must be clearly better</a:t>
             </a:r>
             <a:endParaRPr lang="en-US" sz="1150" dirty="0"/>
           </a:p>
@@ -21831,7 +21834,7 @@
                 <a:ea typeface="Calibri" pitchFamily="34" charset="-122"/>
                 <a:cs typeface="Calibri" pitchFamily="34" charset="-120"/>
               </a:rPr>
-              <a:t>Apply only if the new split beats the current one, re-evaluated under current telemetry, by 15%.</a:t>
+              <a:t>Only change if the new cut beats the current one, measured right now, by 15%.</a:t>
             </a:r>
             <a:endParaRPr lang="en-US" sz="1000" dirty="0"/>
           </a:p>
@@ -21895,7 +21898,7 @@
                 <a:ea typeface="Calibri" pitchFamily="34" charset="-122"/>
                 <a:cs typeface="Calibri" pitchFamily="34" charset="-120"/>
               </a:rPr>
-              <a:t>Cooldown</a:t>
+              <a:t>Wait between changes</a:t>
             </a:r>
             <a:endParaRPr lang="en-US" sz="1150" dirty="0"/>
           </a:p>
@@ -21937,7 +21940,7 @@
                 <a:ea typeface="Calibri" pitchFamily="34" charset="-122"/>
                 <a:cs typeface="Calibri" pitchFamily="34" charset="-120"/>
               </a:rPr>
-              <a:t>At most one change per 30 s, so a transient spike cannot start an oscillation.</a:t>
+              <a:t>At most one change every 30 seconds, so a short spike cannot start a wobble.</a:t>
             </a:r>
             <a:endParaRPr lang="en-US" sz="1000" dirty="0"/>
           </a:p>
@@ -22001,7 +22004,7 @@
                 <a:ea typeface="Calibri" pitchFamily="34" charset="-122"/>
                 <a:cs typeface="Calibri" pitchFamily="34" charset="-120"/>
               </a:rPr>
-              <a:t>Membership override</a:t>
+              <a:t>Except when a machine dies</a:t>
             </a:r>
             <a:endParaRPr lang="en-US" sz="1150" dirty="0"/>
           </a:p>
@@ -22043,7 +22046,7 @@
                 <a:ea typeface="Calibri" pitchFamily="34" charset="-122"/>
                 <a:cs typeface="Calibri" pitchFamily="34" charset="-120"/>
               </a:rPr>
-              <a:t>A changed worker set bypasses both gates and repartitions immediately - correctness beats stability.</a:t>
+              <a:t>If the set of machines changes, ignore both rules and re-cut at once. Being correct matters more than being steady.</a:t>
             </a:r>
             <a:endParaRPr lang="en-US" sz="1000" dirty="0"/>
           </a:p>
@@ -22057,7 +22060,7 @@
         </p:nvSpPr>
         <p:spPr>
           <a:xfrm>
-            <a:off x="6720840" y="5760720"/>
+            <a:off x="6446520" y="5797296"/>
             <a:ext cx="4626864" cy="256032"/>
           </a:xfrm>
           <a:prstGeom prst="rect">
@@ -22074,17 +22077,17 @@
               <a:buNone/>
             </a:pPr>
             <a:r>
-              <a:rPr lang="en-US" sz="800" dirty="0">
-                <a:solidFill>
-                  <a:srgbClr val="7C8698"/>
-                </a:solidFill>
-                <a:latin typeface="Courier New" pitchFamily="34" charset="0"/>
-                <a:ea typeface="Courier New" pitchFamily="34" charset="-122"/>
-                <a:cs typeface="Courier New" pitchFamily="34" charset="-120"/>
-              </a:rPr>
-              <a:t>Both thresholds are tunable live via IMPROVEMENT_FRAC and COOLDOWN_S.</a:t>
-            </a:r>
-            <a:endParaRPr lang="en-US" sz="800" dirty="0"/>
+              <a:rPr lang="en-US" sz="950" i="1" dirty="0">
+                <a:solidFill>
+                  <a:srgbClr val="6B7280"/>
+                </a:solidFill>
+                <a:latin typeface="Calibri" pitchFamily="34" charset="0"/>
+                <a:ea typeface="Calibri" pitchFamily="34" charset="-122"/>
+                <a:cs typeface="Calibri" pitchFamily="34" charset="-120"/>
+              </a:rPr>
+              <a:t>Both numbers can be changed while the system is running.</a:t>
+            </a:r>
+            <a:endParaRPr lang="en-US" sz="950" dirty="0"/>
           </a:p>
         </p:txBody>
       </p:sp>
